--- a/examples/recreations/02_Box_FoundingDocs__Dissolution_DistributionOfAssets_FlowChart/out_mat2ppt.pptx
+++ b/examples/recreations/02_Box_FoundingDocs__Dissolution_DistributionOfAssets_FlowChart/out_mat2ppt.pptx
@@ -1,19 +1,19 @@
 
 <file path=ppt/presentation.xml><?xml version="1.0" encoding="utf-8"?>
-<p:presentation xmlns:a="http://schemas.openxmlformats.org/drawingml/2006/main" xmlns:r="http://schemas.openxmlformats.org/officeDocument/2006/relationships" xmlns:p="http://schemas.openxmlformats.org/presentationml/2006/main" saveSubsetFonts="1" autoCompressPictures="0">
+<p:presentation xmlns:a="http://schemas.openxmlformats.org/drawingml/2006/main" xmlns:r="http://schemas.openxmlformats.org/officeDocument/2006/relationships" xmlns:p="http://schemas.openxmlformats.org/presentationml/2006/main" saveSubsetFonts="1">
   <p:sldMasterIdLst>
     <p:sldMasterId id="2147483648" r:id="rId1"/>
   </p:sldMasterIdLst>
   <p:sldIdLst>
     <p:sldId id="256" r:id="rId7"/>
   </p:sldIdLst>
-  <p:sldSz cx="12192000" cy="6858000" type="screen4x3"/>
+  <p:sldSz cx="12192000" cy="6858000"/>
   <p:notesSz cx="6858000" cy="9144000"/>
   <p:defaultTextStyle>
     <a:defPPr>
       <a:defRPr lang="en-US"/>
     </a:defPPr>
-    <a:lvl1pPr marL="0" algn="l" defTabSz="457200" rtl="0" eaLnBrk="1" latinLnBrk="0" hangingPunct="1">
+    <a:lvl1pPr marL="0" algn="l" defTabSz="914400" rtl="0" eaLnBrk="1" latinLnBrk="0" hangingPunct="1">
       <a:defRPr sz="1800" kern="1200">
         <a:solidFill>
           <a:schemeClr val="tx1"/>
@@ -23,7 +23,7 @@
         <a:cs typeface="+mn-cs"/>
       </a:defRPr>
     </a:lvl1pPr>
-    <a:lvl2pPr marL="457200" algn="l" defTabSz="457200" rtl="0" eaLnBrk="1" latinLnBrk="0" hangingPunct="1">
+    <a:lvl2pPr marL="457200" algn="l" defTabSz="914400" rtl="0" eaLnBrk="1" latinLnBrk="0" hangingPunct="1">
       <a:defRPr sz="1800" kern="1200">
         <a:solidFill>
           <a:schemeClr val="tx1"/>
@@ -33,7 +33,7 @@
         <a:cs typeface="+mn-cs"/>
       </a:defRPr>
     </a:lvl2pPr>
-    <a:lvl3pPr marL="914400" algn="l" defTabSz="457200" rtl="0" eaLnBrk="1" latinLnBrk="0" hangingPunct="1">
+    <a:lvl3pPr marL="914400" algn="l" defTabSz="914400" rtl="0" eaLnBrk="1" latinLnBrk="0" hangingPunct="1">
       <a:defRPr sz="1800" kern="1200">
         <a:solidFill>
           <a:schemeClr val="tx1"/>
@@ -43,7 +43,7 @@
         <a:cs typeface="+mn-cs"/>
       </a:defRPr>
     </a:lvl3pPr>
-    <a:lvl4pPr marL="1371600" algn="l" defTabSz="457200" rtl="0" eaLnBrk="1" latinLnBrk="0" hangingPunct="1">
+    <a:lvl4pPr marL="1371600" algn="l" defTabSz="914400" rtl="0" eaLnBrk="1" latinLnBrk="0" hangingPunct="1">
       <a:defRPr sz="1800" kern="1200">
         <a:solidFill>
           <a:schemeClr val="tx1"/>
@@ -53,7 +53,7 @@
         <a:cs typeface="+mn-cs"/>
       </a:defRPr>
     </a:lvl4pPr>
-    <a:lvl5pPr marL="1828800" algn="l" defTabSz="457200" rtl="0" eaLnBrk="1" latinLnBrk="0" hangingPunct="1">
+    <a:lvl5pPr marL="1828800" algn="l" defTabSz="914400" rtl="0" eaLnBrk="1" latinLnBrk="0" hangingPunct="1">
       <a:defRPr sz="1800" kern="1200">
         <a:solidFill>
           <a:schemeClr val="tx1"/>
@@ -63,7 +63,7 @@
         <a:cs typeface="+mn-cs"/>
       </a:defRPr>
     </a:lvl5pPr>
-    <a:lvl6pPr marL="2286000" algn="l" defTabSz="457200" rtl="0" eaLnBrk="1" latinLnBrk="0" hangingPunct="1">
+    <a:lvl6pPr marL="2286000" algn="l" defTabSz="914400" rtl="0" eaLnBrk="1" latinLnBrk="0" hangingPunct="1">
       <a:defRPr sz="1800" kern="1200">
         <a:solidFill>
           <a:schemeClr val="tx1"/>
@@ -73,7 +73,7 @@
         <a:cs typeface="+mn-cs"/>
       </a:defRPr>
     </a:lvl6pPr>
-    <a:lvl7pPr marL="2743200" algn="l" defTabSz="457200" rtl="0" eaLnBrk="1" latinLnBrk="0" hangingPunct="1">
+    <a:lvl7pPr marL="2743200" algn="l" defTabSz="914400" rtl="0" eaLnBrk="1" latinLnBrk="0" hangingPunct="1">
       <a:defRPr sz="1800" kern="1200">
         <a:solidFill>
           <a:schemeClr val="tx1"/>
@@ -83,7 +83,7 @@
         <a:cs typeface="+mn-cs"/>
       </a:defRPr>
     </a:lvl7pPr>
-    <a:lvl8pPr marL="3200400" algn="l" defTabSz="457200" rtl="0" eaLnBrk="1" latinLnBrk="0" hangingPunct="1">
+    <a:lvl8pPr marL="3200400" algn="l" defTabSz="914400" rtl="0" eaLnBrk="1" latinLnBrk="0" hangingPunct="1">
       <a:defRPr sz="1800" kern="1200">
         <a:solidFill>
           <a:schemeClr val="tx1"/>
@@ -93,7 +93,7 @@
         <a:cs typeface="+mn-cs"/>
       </a:defRPr>
     </a:lvl8pPr>
-    <a:lvl9pPr marL="3657600" algn="l" defTabSz="457200" rtl="0" eaLnBrk="1" latinLnBrk="0" hangingPunct="1">
+    <a:lvl9pPr marL="3657600" algn="l" defTabSz="914400" rtl="0" eaLnBrk="1" latinLnBrk="0" hangingPunct="1">
       <a:defRPr sz="1800" kern="1200">
         <a:solidFill>
           <a:schemeClr val="tx1"/>
@@ -104,6 +104,22 @@
       </a:defRPr>
     </a:lvl9pPr>
   </p:defaultTextStyle>
+  <p:extLst>
+    <p:ext uri="{EFAFB233-063F-42B5-8137-9DF3F51BA10A}">
+      <p15:sldGuideLst xmlns:p15="http://schemas.microsoft.com/office/powerpoint/2012/main">
+        <p15:guide id="1" orient="horz" pos="2160" userDrawn="1">
+          <p15:clr>
+            <a:srgbClr val="A4A3A4"/>
+          </p15:clr>
+        </p15:guide>
+        <p15:guide id="2" pos="3840" userDrawn="1">
+          <p15:clr>
+            <a:srgbClr val="A4A3A4"/>
+          </p15:clr>
+        </p15:guide>
+      </p15:sldGuideLst>
+    </p:ext>
+  </p:extLst>
 </p:presentation>
 </file>
 
@@ -126,7 +142,13 @@
       </p:grpSpPr>
       <p:sp>
         <p:nvSpPr>
-          <p:cNvPr id="2" name="Title 1"/>
+          <p:cNvPr id="2" name="Title 1">
+            <a:extLst>
+              <a:ext uri="{FF2B5EF4-FFF2-40B4-BE49-F238E27FC236}">
+                <a16:creationId xmlns:a16="http://schemas.microsoft.com/office/drawing/2014/main" id="{CDA4D380-C0C6-47DA-A8C8-C14F1039C5BC}"/>
+              </a:ext>
+            </a:extLst>
+          </p:cNvPr>
           <p:cNvSpPr>
             <a:spLocks noGrp="1"/>
           </p:cNvSpPr>
@@ -136,25 +158,34 @@
         </p:nvSpPr>
         <p:spPr>
           <a:xfrm>
-            <a:off x="685800" y="2130425"/>
-            <a:ext cx="7772400" cy="1470025"/>
-          </a:xfrm>
-        </p:spPr>
-        <p:txBody>
-          <a:bodyPr/>
-          <a:lstStyle/>
-          <a:p>
-            <a:r>
-              <a:rPr lang="en-US" smtClean="0"/>
+            <a:off x="1524000" y="1122363"/>
+            <a:ext cx="9144000" cy="2387600"/>
+          </a:xfrm>
+        </p:spPr>
+        <p:txBody>
+          <a:bodyPr anchor="b"/>
+          <a:lstStyle>
+            <a:lvl1pPr algn="ctr">
+              <a:defRPr sz="6000"/>
+            </a:lvl1pPr>
+          </a:lstStyle>
+          <a:p>
+            <a:r>
+              <a:rPr lang="en-US"/>
               <a:t>Click to edit Master title style</a:t>
             </a:r>
-            <a:endParaRPr lang="en-US"/>
-          </a:p>
-        </p:txBody>
-      </p:sp>
-      <p:sp>
-        <p:nvSpPr>
-          <p:cNvPr id="3" name="Subtitle 2"/>
+          </a:p>
+        </p:txBody>
+      </p:sp>
+      <p:sp>
+        <p:nvSpPr>
+          <p:cNvPr id="3" name="Subtitle 2">
+            <a:extLst>
+              <a:ext uri="{FF2B5EF4-FFF2-40B4-BE49-F238E27FC236}">
+                <a16:creationId xmlns:a16="http://schemas.microsoft.com/office/drawing/2014/main" id="{B9657881-F695-42B2-A2E4-91B8BB47BC74}"/>
+              </a:ext>
+            </a:extLst>
+          </p:cNvPr>
           <p:cNvSpPr>
             <a:spLocks noGrp="1"/>
           </p:cNvSpPr>
@@ -164,8 +195,8 @@
         </p:nvSpPr>
         <p:spPr>
           <a:xfrm>
-            <a:off x="1371600" y="3886200"/>
-            <a:ext cx="6400800" cy="1752600"/>
+            <a:off x="1524000" y="3602038"/>
+            <a:ext cx="9144000" cy="1655762"/>
           </a:xfrm>
         </p:spPr>
         <p:txBody>
@@ -173,122 +204,73 @@
           <a:lstStyle>
             <a:lvl1pPr marL="0" indent="0" algn="ctr">
               <a:buNone/>
-              <a:defRPr>
-                <a:solidFill>
-                  <a:schemeClr val="tx1">
-                    <a:tint val="75000"/>
-                  </a:schemeClr>
-                </a:solidFill>
-              </a:defRPr>
+              <a:defRPr sz="2400"/>
             </a:lvl1pPr>
             <a:lvl2pPr marL="457200" indent="0" algn="ctr">
               <a:buNone/>
-              <a:defRPr>
-                <a:solidFill>
-                  <a:schemeClr val="tx1">
-                    <a:tint val="75000"/>
-                  </a:schemeClr>
-                </a:solidFill>
-              </a:defRPr>
+              <a:defRPr sz="2000"/>
             </a:lvl2pPr>
             <a:lvl3pPr marL="914400" indent="0" algn="ctr">
               <a:buNone/>
-              <a:defRPr>
-                <a:solidFill>
-                  <a:schemeClr val="tx1">
-                    <a:tint val="75000"/>
-                  </a:schemeClr>
-                </a:solidFill>
-              </a:defRPr>
+              <a:defRPr sz="1800"/>
             </a:lvl3pPr>
             <a:lvl4pPr marL="1371600" indent="0" algn="ctr">
               <a:buNone/>
-              <a:defRPr>
-                <a:solidFill>
-                  <a:schemeClr val="tx1">
-                    <a:tint val="75000"/>
-                  </a:schemeClr>
-                </a:solidFill>
-              </a:defRPr>
+              <a:defRPr sz="1600"/>
             </a:lvl4pPr>
             <a:lvl5pPr marL="1828800" indent="0" algn="ctr">
               <a:buNone/>
-              <a:defRPr>
-                <a:solidFill>
-                  <a:schemeClr val="tx1">
-                    <a:tint val="75000"/>
-                  </a:schemeClr>
-                </a:solidFill>
-              </a:defRPr>
+              <a:defRPr sz="1600"/>
             </a:lvl5pPr>
             <a:lvl6pPr marL="2286000" indent="0" algn="ctr">
               <a:buNone/>
-              <a:defRPr>
-                <a:solidFill>
-                  <a:schemeClr val="tx1">
-                    <a:tint val="75000"/>
-                  </a:schemeClr>
-                </a:solidFill>
-              </a:defRPr>
+              <a:defRPr sz="1600"/>
             </a:lvl6pPr>
             <a:lvl7pPr marL="2743200" indent="0" algn="ctr">
               <a:buNone/>
-              <a:defRPr>
-                <a:solidFill>
-                  <a:schemeClr val="tx1">
-                    <a:tint val="75000"/>
-                  </a:schemeClr>
-                </a:solidFill>
-              </a:defRPr>
+              <a:defRPr sz="1600"/>
             </a:lvl7pPr>
             <a:lvl8pPr marL="3200400" indent="0" algn="ctr">
               <a:buNone/>
-              <a:defRPr>
-                <a:solidFill>
-                  <a:schemeClr val="tx1">
-                    <a:tint val="75000"/>
-                  </a:schemeClr>
-                </a:solidFill>
-              </a:defRPr>
+              <a:defRPr sz="1600"/>
             </a:lvl8pPr>
             <a:lvl9pPr marL="3657600" indent="0" algn="ctr">
               <a:buNone/>
-              <a:defRPr>
-                <a:solidFill>
-                  <a:schemeClr val="tx1">
-                    <a:tint val="75000"/>
-                  </a:schemeClr>
-                </a:solidFill>
-              </a:defRPr>
+              <a:defRPr sz="1600"/>
             </a:lvl9pPr>
           </a:lstStyle>
           <a:p>
             <a:r>
+              <a:rPr lang="en-US"/>
+              <a:t>Click to edit Master subtitle style</a:t>
+            </a:r>
+          </a:p>
+        </p:txBody>
+      </p:sp>
+      <p:sp>
+        <p:nvSpPr>
+          <p:cNvPr id="4" name="Date Placeholder 3">
+            <a:extLst>
+              <a:ext uri="{FF2B5EF4-FFF2-40B4-BE49-F238E27FC236}">
+                <a16:creationId xmlns:a16="http://schemas.microsoft.com/office/drawing/2014/main" id="{4C0D93DC-3E4B-42A1-A402-20F08B8DD8B8}"/>
+              </a:ext>
+            </a:extLst>
+          </p:cNvPr>
+          <p:cNvSpPr>
+            <a:spLocks noGrp="1"/>
+          </p:cNvSpPr>
+          <p:nvPr>
+            <p:ph type="dt" sz="half" idx="10"/>
+          </p:nvPr>
+        </p:nvSpPr>
+        <p:spPr/>
+        <p:txBody>
+          <a:bodyPr/>
+          <a:lstStyle/>
+          <a:p>
+            <a:fld id="{B55CAEFD-F031-424F-9422-B2C0B702207F}" type="datetimeFigureOut">
               <a:rPr lang="en-US" smtClean="0"/>
-              <a:t>Click to edit Master subtitle style</a:t>
-            </a:r>
-            <a:endParaRPr lang="en-US"/>
-          </a:p>
-        </p:txBody>
-      </p:sp>
-      <p:sp>
-        <p:nvSpPr>
-          <p:cNvPr id="4" name="Date Placeholder 3"/>
-          <p:cNvSpPr>
-            <a:spLocks noGrp="1"/>
-          </p:cNvSpPr>
-          <p:nvPr>
-            <p:ph type="dt" sz="half" idx="10"/>
-          </p:nvPr>
-        </p:nvSpPr>
-        <p:spPr/>
-        <p:txBody>
-          <a:bodyPr/>
-          <a:lstStyle/>
-          <a:p>
-            <a:fld id="{5BCAD085-E8A6-8845-BD4E-CB4CCA059FC4}" type="datetimeFigureOut">
-              <a:rPr lang="en-US" smtClean="0"/>
-              <a:t>1/27/13</a:t>
+              <a:t>6/25/2021</a:t>
             </a:fld>
             <a:endParaRPr lang="en-US"/>
           </a:p>
@@ -296,7 +278,13 @@
       </p:sp>
       <p:sp>
         <p:nvSpPr>
-          <p:cNvPr id="5" name="Footer Placeholder 4"/>
+          <p:cNvPr id="5" name="Footer Placeholder 4">
+            <a:extLst>
+              <a:ext uri="{FF2B5EF4-FFF2-40B4-BE49-F238E27FC236}">
+                <a16:creationId xmlns:a16="http://schemas.microsoft.com/office/drawing/2014/main" id="{3D3E85B5-4365-4C0D-8D18-DA3BB082127D}"/>
+              </a:ext>
+            </a:extLst>
+          </p:cNvPr>
           <p:cNvSpPr>
             <a:spLocks noGrp="1"/>
           </p:cNvSpPr>
@@ -315,7 +303,13 @@
       </p:sp>
       <p:sp>
         <p:nvSpPr>
-          <p:cNvPr id="6" name="Slide Number Placeholder 5"/>
+          <p:cNvPr id="6" name="Slide Number Placeholder 5">
+            <a:extLst>
+              <a:ext uri="{FF2B5EF4-FFF2-40B4-BE49-F238E27FC236}">
+                <a16:creationId xmlns:a16="http://schemas.microsoft.com/office/drawing/2014/main" id="{527010F2-4DD5-4117-9F22-93D35E9689D5}"/>
+              </a:ext>
+            </a:extLst>
+          </p:cNvPr>
           <p:cNvSpPr>
             <a:spLocks noGrp="1"/>
           </p:cNvSpPr>
@@ -328,7 +322,7 @@
           <a:bodyPr/>
           <a:lstStyle/>
           <a:p>
-            <a:fld id="{C1FF6DA9-008F-8B48-92A6-B652298478BF}" type="slidenum">
+            <a:fld id="{8951AC35-B36C-4D75-A6AF-F09D66D83A88}" type="slidenum">
               <a:rPr lang="en-US" smtClean="0"/>
               <a:t>‹#›</a:t>
             </a:fld>
@@ -339,7 +333,7 @@
     </p:spTree>
     <p:extLst>
       <p:ext uri="{BB962C8B-B14F-4D97-AF65-F5344CB8AC3E}">
-        <p14:creationId xmlns:p14="http://schemas.microsoft.com/office/powerpoint/2010/main" val="3168075583"/>
+        <p14:creationId xmlns:p14="http://schemas.microsoft.com/office/powerpoint/2010/main" val="782876218"/>
       </p:ext>
     </p:extLst>
   </p:cSld>
@@ -368,7 +362,13 @@
       </p:grpSpPr>
       <p:sp>
         <p:nvSpPr>
-          <p:cNvPr id="2" name="Title 1"/>
+          <p:cNvPr id="2" name="Title 1">
+            <a:extLst>
+              <a:ext uri="{FF2B5EF4-FFF2-40B4-BE49-F238E27FC236}">
+                <a16:creationId xmlns:a16="http://schemas.microsoft.com/office/drawing/2014/main" id="{EE63989A-2EBD-4C0B-98BA-5ACB7973DBC6}"/>
+              </a:ext>
+            </a:extLst>
+          </p:cNvPr>
           <p:cNvSpPr>
             <a:spLocks noGrp="1"/>
           </p:cNvSpPr>
@@ -382,83 +382,93 @@
           <a:lstStyle/>
           <a:p>
             <a:r>
+              <a:rPr lang="en-US"/>
+              <a:t>Click to edit Master title style</a:t>
+            </a:r>
+          </a:p>
+        </p:txBody>
+      </p:sp>
+      <p:sp>
+        <p:nvSpPr>
+          <p:cNvPr id="3" name="Vertical Text Placeholder 2">
+            <a:extLst>
+              <a:ext uri="{FF2B5EF4-FFF2-40B4-BE49-F238E27FC236}">
+                <a16:creationId xmlns:a16="http://schemas.microsoft.com/office/drawing/2014/main" id="{0380F2F7-9354-4119-9718-26D7C366BD51}"/>
+              </a:ext>
+            </a:extLst>
+          </p:cNvPr>
+          <p:cNvSpPr>
+            <a:spLocks noGrp="1"/>
+          </p:cNvSpPr>
+          <p:nvPr>
+            <p:ph type="body" orient="vert" idx="1"/>
+          </p:nvPr>
+        </p:nvSpPr>
+        <p:spPr/>
+        <p:txBody>
+          <a:bodyPr vert="eaVert"/>
+          <a:lstStyle/>
+          <a:p>
+            <a:pPr lvl="0"/>
+            <a:r>
+              <a:rPr lang="en-US"/>
+              <a:t>Click to edit Master text styles</a:t>
+            </a:r>
+          </a:p>
+          <a:p>
+            <a:pPr lvl="1"/>
+            <a:r>
+              <a:rPr lang="en-US"/>
+              <a:t>Second level</a:t>
+            </a:r>
+          </a:p>
+          <a:p>
+            <a:pPr lvl="2"/>
+            <a:r>
+              <a:rPr lang="en-US"/>
+              <a:t>Third level</a:t>
+            </a:r>
+          </a:p>
+          <a:p>
+            <a:pPr lvl="3"/>
+            <a:r>
+              <a:rPr lang="en-US"/>
+              <a:t>Fourth level</a:t>
+            </a:r>
+          </a:p>
+          <a:p>
+            <a:pPr lvl="4"/>
+            <a:r>
+              <a:rPr lang="en-US"/>
+              <a:t>Fifth level</a:t>
+            </a:r>
+          </a:p>
+        </p:txBody>
+      </p:sp>
+      <p:sp>
+        <p:nvSpPr>
+          <p:cNvPr id="4" name="Date Placeholder 3">
+            <a:extLst>
+              <a:ext uri="{FF2B5EF4-FFF2-40B4-BE49-F238E27FC236}">
+                <a16:creationId xmlns:a16="http://schemas.microsoft.com/office/drawing/2014/main" id="{7DB87FD1-4C51-4EAF-A4A0-7D94CA70E0BF}"/>
+              </a:ext>
+            </a:extLst>
+          </p:cNvPr>
+          <p:cNvSpPr>
+            <a:spLocks noGrp="1"/>
+          </p:cNvSpPr>
+          <p:nvPr>
+            <p:ph type="dt" sz="half" idx="10"/>
+          </p:nvPr>
+        </p:nvSpPr>
+        <p:spPr/>
+        <p:txBody>
+          <a:bodyPr/>
+          <a:lstStyle/>
+          <a:p>
+            <a:fld id="{B55CAEFD-F031-424F-9422-B2C0B702207F}" type="datetimeFigureOut">
               <a:rPr lang="en-US" smtClean="0"/>
-              <a:t>Click to edit Master title style</a:t>
-            </a:r>
-            <a:endParaRPr lang="en-US"/>
-          </a:p>
-        </p:txBody>
-      </p:sp>
-      <p:sp>
-        <p:nvSpPr>
-          <p:cNvPr id="3" name="Vertical Text Placeholder 2"/>
-          <p:cNvSpPr>
-            <a:spLocks noGrp="1"/>
-          </p:cNvSpPr>
-          <p:nvPr>
-            <p:ph type="body" orient="vert" idx="1"/>
-          </p:nvPr>
-        </p:nvSpPr>
-        <p:spPr/>
-        <p:txBody>
-          <a:bodyPr vert="eaVert"/>
-          <a:lstStyle/>
-          <a:p>
-            <a:pPr lvl="0"/>
-            <a:r>
-              <a:rPr lang="en-US" smtClean="0"/>
-              <a:t>Click to edit Master text styles</a:t>
-            </a:r>
-          </a:p>
-          <a:p>
-            <a:pPr lvl="1"/>
-            <a:r>
-              <a:rPr lang="en-US" smtClean="0"/>
-              <a:t>Second level</a:t>
-            </a:r>
-          </a:p>
-          <a:p>
-            <a:pPr lvl="2"/>
-            <a:r>
-              <a:rPr lang="en-US" smtClean="0"/>
-              <a:t>Third level</a:t>
-            </a:r>
-          </a:p>
-          <a:p>
-            <a:pPr lvl="3"/>
-            <a:r>
-              <a:rPr lang="en-US" smtClean="0"/>
-              <a:t>Fourth level</a:t>
-            </a:r>
-          </a:p>
-          <a:p>
-            <a:pPr lvl="4"/>
-            <a:r>
-              <a:rPr lang="en-US" smtClean="0"/>
-              <a:t>Fifth level</a:t>
-            </a:r>
-            <a:endParaRPr lang="en-US"/>
-          </a:p>
-        </p:txBody>
-      </p:sp>
-      <p:sp>
-        <p:nvSpPr>
-          <p:cNvPr id="4" name="Date Placeholder 3"/>
-          <p:cNvSpPr>
-            <a:spLocks noGrp="1"/>
-          </p:cNvSpPr>
-          <p:nvPr>
-            <p:ph type="dt" sz="half" idx="10"/>
-          </p:nvPr>
-        </p:nvSpPr>
-        <p:spPr/>
-        <p:txBody>
-          <a:bodyPr/>
-          <a:lstStyle/>
-          <a:p>
-            <a:fld id="{5BCAD085-E8A6-8845-BD4E-CB4CCA059FC4}" type="datetimeFigureOut">
-              <a:rPr lang="en-US" smtClean="0"/>
-              <a:t>1/27/13</a:t>
+              <a:t>6/25/2021</a:t>
             </a:fld>
             <a:endParaRPr lang="en-US"/>
           </a:p>
@@ -466,7 +476,13 @@
       </p:sp>
       <p:sp>
         <p:nvSpPr>
-          <p:cNvPr id="5" name="Footer Placeholder 4"/>
+          <p:cNvPr id="5" name="Footer Placeholder 4">
+            <a:extLst>
+              <a:ext uri="{FF2B5EF4-FFF2-40B4-BE49-F238E27FC236}">
+                <a16:creationId xmlns:a16="http://schemas.microsoft.com/office/drawing/2014/main" id="{979E0840-7836-4370-B0D7-CA4EF2559BA5}"/>
+              </a:ext>
+            </a:extLst>
+          </p:cNvPr>
           <p:cNvSpPr>
             <a:spLocks noGrp="1"/>
           </p:cNvSpPr>
@@ -485,7 +501,13 @@
       </p:sp>
       <p:sp>
         <p:nvSpPr>
-          <p:cNvPr id="6" name="Slide Number Placeholder 5"/>
+          <p:cNvPr id="6" name="Slide Number Placeholder 5">
+            <a:extLst>
+              <a:ext uri="{FF2B5EF4-FFF2-40B4-BE49-F238E27FC236}">
+                <a16:creationId xmlns:a16="http://schemas.microsoft.com/office/drawing/2014/main" id="{2D5B51F8-D701-4C17-97DF-5F7BC95D5AFE}"/>
+              </a:ext>
+            </a:extLst>
+          </p:cNvPr>
           <p:cNvSpPr>
             <a:spLocks noGrp="1"/>
           </p:cNvSpPr>
@@ -498,7 +520,7 @@
           <a:bodyPr/>
           <a:lstStyle/>
           <a:p>
-            <a:fld id="{C1FF6DA9-008F-8B48-92A6-B652298478BF}" type="slidenum">
+            <a:fld id="{8951AC35-B36C-4D75-A6AF-F09D66D83A88}" type="slidenum">
               <a:rPr lang="en-US" smtClean="0"/>
               <a:t>‹#›</a:t>
             </a:fld>
@@ -509,7 +531,7 @@
     </p:spTree>
     <p:extLst>
       <p:ext uri="{BB962C8B-B14F-4D97-AF65-F5344CB8AC3E}">
-        <p14:creationId xmlns:p14="http://schemas.microsoft.com/office/powerpoint/2010/main" val="2910927964"/>
+        <p14:creationId xmlns:p14="http://schemas.microsoft.com/office/powerpoint/2010/main" val="1457121803"/>
       </p:ext>
     </p:extLst>
   </p:cSld>
@@ -538,7 +560,13 @@
       </p:grpSpPr>
       <p:sp>
         <p:nvSpPr>
-          <p:cNvPr id="2" name="Vertical Title 1"/>
+          <p:cNvPr id="2" name="Vertical Title 1">
+            <a:extLst>
+              <a:ext uri="{FF2B5EF4-FFF2-40B4-BE49-F238E27FC236}">
+                <a16:creationId xmlns:a16="http://schemas.microsoft.com/office/drawing/2014/main" id="{26F06C3C-2578-4C17-8DA4-6F1FB188F7CA}"/>
+              </a:ext>
+            </a:extLst>
+          </p:cNvPr>
           <p:cNvSpPr>
             <a:spLocks noGrp="1"/>
           </p:cNvSpPr>
@@ -548,8 +576,8 @@
         </p:nvSpPr>
         <p:spPr>
           <a:xfrm>
-            <a:off x="6629400" y="274638"/>
-            <a:ext cx="2057400" cy="5851525"/>
+            <a:off x="8724900" y="365125"/>
+            <a:ext cx="2628900" cy="5811838"/>
           </a:xfrm>
         </p:spPr>
         <p:txBody>
@@ -557,88 +585,98 @@
           <a:lstStyle/>
           <a:p>
             <a:r>
+              <a:rPr lang="en-US"/>
+              <a:t>Click to edit Master title style</a:t>
+            </a:r>
+          </a:p>
+        </p:txBody>
+      </p:sp>
+      <p:sp>
+        <p:nvSpPr>
+          <p:cNvPr id="3" name="Vertical Text Placeholder 2">
+            <a:extLst>
+              <a:ext uri="{FF2B5EF4-FFF2-40B4-BE49-F238E27FC236}">
+                <a16:creationId xmlns:a16="http://schemas.microsoft.com/office/drawing/2014/main" id="{301D8E9E-5C64-4015-B829-65306E2F2338}"/>
+              </a:ext>
+            </a:extLst>
+          </p:cNvPr>
+          <p:cNvSpPr>
+            <a:spLocks noGrp="1"/>
+          </p:cNvSpPr>
+          <p:nvPr>
+            <p:ph type="body" orient="vert" idx="1"/>
+          </p:nvPr>
+        </p:nvSpPr>
+        <p:spPr>
+          <a:xfrm>
+            <a:off x="838200" y="365125"/>
+            <a:ext cx="7734300" cy="5811838"/>
+          </a:xfrm>
+        </p:spPr>
+        <p:txBody>
+          <a:bodyPr vert="eaVert"/>
+          <a:lstStyle/>
+          <a:p>
+            <a:pPr lvl="0"/>
+            <a:r>
+              <a:rPr lang="en-US"/>
+              <a:t>Click to edit Master text styles</a:t>
+            </a:r>
+          </a:p>
+          <a:p>
+            <a:pPr lvl="1"/>
+            <a:r>
+              <a:rPr lang="en-US"/>
+              <a:t>Second level</a:t>
+            </a:r>
+          </a:p>
+          <a:p>
+            <a:pPr lvl="2"/>
+            <a:r>
+              <a:rPr lang="en-US"/>
+              <a:t>Third level</a:t>
+            </a:r>
+          </a:p>
+          <a:p>
+            <a:pPr lvl="3"/>
+            <a:r>
+              <a:rPr lang="en-US"/>
+              <a:t>Fourth level</a:t>
+            </a:r>
+          </a:p>
+          <a:p>
+            <a:pPr lvl="4"/>
+            <a:r>
+              <a:rPr lang="en-US"/>
+              <a:t>Fifth level</a:t>
+            </a:r>
+          </a:p>
+        </p:txBody>
+      </p:sp>
+      <p:sp>
+        <p:nvSpPr>
+          <p:cNvPr id="4" name="Date Placeholder 3">
+            <a:extLst>
+              <a:ext uri="{FF2B5EF4-FFF2-40B4-BE49-F238E27FC236}">
+                <a16:creationId xmlns:a16="http://schemas.microsoft.com/office/drawing/2014/main" id="{92D95A03-7513-4143-BA31-AC062599726A}"/>
+              </a:ext>
+            </a:extLst>
+          </p:cNvPr>
+          <p:cNvSpPr>
+            <a:spLocks noGrp="1"/>
+          </p:cNvSpPr>
+          <p:nvPr>
+            <p:ph type="dt" sz="half" idx="10"/>
+          </p:nvPr>
+        </p:nvSpPr>
+        <p:spPr/>
+        <p:txBody>
+          <a:bodyPr/>
+          <a:lstStyle/>
+          <a:p>
+            <a:fld id="{B55CAEFD-F031-424F-9422-B2C0B702207F}" type="datetimeFigureOut">
               <a:rPr lang="en-US" smtClean="0"/>
-              <a:t>Click to edit Master title style</a:t>
-            </a:r>
-            <a:endParaRPr lang="en-US"/>
-          </a:p>
-        </p:txBody>
-      </p:sp>
-      <p:sp>
-        <p:nvSpPr>
-          <p:cNvPr id="3" name="Vertical Text Placeholder 2"/>
-          <p:cNvSpPr>
-            <a:spLocks noGrp="1"/>
-          </p:cNvSpPr>
-          <p:nvPr>
-            <p:ph type="body" orient="vert" idx="1"/>
-          </p:nvPr>
-        </p:nvSpPr>
-        <p:spPr>
-          <a:xfrm>
-            <a:off x="457200" y="274638"/>
-            <a:ext cx="6019800" cy="5851525"/>
-          </a:xfrm>
-        </p:spPr>
-        <p:txBody>
-          <a:bodyPr vert="eaVert"/>
-          <a:lstStyle/>
-          <a:p>
-            <a:pPr lvl="0"/>
-            <a:r>
-              <a:rPr lang="en-US" smtClean="0"/>
-              <a:t>Click to edit Master text styles</a:t>
-            </a:r>
-          </a:p>
-          <a:p>
-            <a:pPr lvl="1"/>
-            <a:r>
-              <a:rPr lang="en-US" smtClean="0"/>
-              <a:t>Second level</a:t>
-            </a:r>
-          </a:p>
-          <a:p>
-            <a:pPr lvl="2"/>
-            <a:r>
-              <a:rPr lang="en-US" smtClean="0"/>
-              <a:t>Third level</a:t>
-            </a:r>
-          </a:p>
-          <a:p>
-            <a:pPr lvl="3"/>
-            <a:r>
-              <a:rPr lang="en-US" smtClean="0"/>
-              <a:t>Fourth level</a:t>
-            </a:r>
-          </a:p>
-          <a:p>
-            <a:pPr lvl="4"/>
-            <a:r>
-              <a:rPr lang="en-US" smtClean="0"/>
-              <a:t>Fifth level</a:t>
-            </a:r>
-            <a:endParaRPr lang="en-US"/>
-          </a:p>
-        </p:txBody>
-      </p:sp>
-      <p:sp>
-        <p:nvSpPr>
-          <p:cNvPr id="4" name="Date Placeholder 3"/>
-          <p:cNvSpPr>
-            <a:spLocks noGrp="1"/>
-          </p:cNvSpPr>
-          <p:nvPr>
-            <p:ph type="dt" sz="half" idx="10"/>
-          </p:nvPr>
-        </p:nvSpPr>
-        <p:spPr/>
-        <p:txBody>
-          <a:bodyPr/>
-          <a:lstStyle/>
-          <a:p>
-            <a:fld id="{5BCAD085-E8A6-8845-BD4E-CB4CCA059FC4}" type="datetimeFigureOut">
-              <a:rPr lang="en-US" smtClean="0"/>
-              <a:t>1/27/13</a:t>
+              <a:t>6/25/2021</a:t>
             </a:fld>
             <a:endParaRPr lang="en-US"/>
           </a:p>
@@ -646,7 +684,13 @@
       </p:sp>
       <p:sp>
         <p:nvSpPr>
-          <p:cNvPr id="5" name="Footer Placeholder 4"/>
+          <p:cNvPr id="5" name="Footer Placeholder 4">
+            <a:extLst>
+              <a:ext uri="{FF2B5EF4-FFF2-40B4-BE49-F238E27FC236}">
+                <a16:creationId xmlns:a16="http://schemas.microsoft.com/office/drawing/2014/main" id="{7744BC4C-4250-4683-85B7-2760734B4A37}"/>
+              </a:ext>
+            </a:extLst>
+          </p:cNvPr>
           <p:cNvSpPr>
             <a:spLocks noGrp="1"/>
           </p:cNvSpPr>
@@ -665,7 +709,13 @@
       </p:sp>
       <p:sp>
         <p:nvSpPr>
-          <p:cNvPr id="6" name="Slide Number Placeholder 5"/>
+          <p:cNvPr id="6" name="Slide Number Placeholder 5">
+            <a:extLst>
+              <a:ext uri="{FF2B5EF4-FFF2-40B4-BE49-F238E27FC236}">
+                <a16:creationId xmlns:a16="http://schemas.microsoft.com/office/drawing/2014/main" id="{5D564DD6-92DB-4028-B5DF-BF90B67D7D2D}"/>
+              </a:ext>
+            </a:extLst>
+          </p:cNvPr>
           <p:cNvSpPr>
             <a:spLocks noGrp="1"/>
           </p:cNvSpPr>
@@ -678,7 +728,7 @@
           <a:bodyPr/>
           <a:lstStyle/>
           <a:p>
-            <a:fld id="{C1FF6DA9-008F-8B48-92A6-B652298478BF}" type="slidenum">
+            <a:fld id="{8951AC35-B36C-4D75-A6AF-F09D66D83A88}" type="slidenum">
               <a:rPr lang="en-US" smtClean="0"/>
               <a:t>‹#›</a:t>
             </a:fld>
@@ -689,7 +739,7 @@
     </p:spTree>
     <p:extLst>
       <p:ext uri="{BB962C8B-B14F-4D97-AF65-F5344CB8AC3E}">
-        <p14:creationId xmlns:p14="http://schemas.microsoft.com/office/powerpoint/2010/main" val="3612223792"/>
+        <p14:creationId xmlns:p14="http://schemas.microsoft.com/office/powerpoint/2010/main" val="488534116"/>
       </p:ext>
     </p:extLst>
   </p:cSld>
@@ -718,7 +768,13 @@
       </p:grpSpPr>
       <p:sp>
         <p:nvSpPr>
-          <p:cNvPr id="2" name="Title 1"/>
+          <p:cNvPr id="2" name="Title 1">
+            <a:extLst>
+              <a:ext uri="{FF2B5EF4-FFF2-40B4-BE49-F238E27FC236}">
+                <a16:creationId xmlns:a16="http://schemas.microsoft.com/office/drawing/2014/main" id="{0577E91C-7678-4902-BE65-52362EDABA97}"/>
+              </a:ext>
+            </a:extLst>
+          </p:cNvPr>
           <p:cNvSpPr>
             <a:spLocks noGrp="1"/>
           </p:cNvSpPr>
@@ -732,83 +788,93 @@
           <a:lstStyle/>
           <a:p>
             <a:r>
+              <a:rPr lang="en-US"/>
+              <a:t>Click to edit Master title style</a:t>
+            </a:r>
+          </a:p>
+        </p:txBody>
+      </p:sp>
+      <p:sp>
+        <p:nvSpPr>
+          <p:cNvPr id="3" name="Content Placeholder 2">
+            <a:extLst>
+              <a:ext uri="{FF2B5EF4-FFF2-40B4-BE49-F238E27FC236}">
+                <a16:creationId xmlns:a16="http://schemas.microsoft.com/office/drawing/2014/main" id="{FAC915C4-72C5-4178-B4EC-002B12B93EBD}"/>
+              </a:ext>
+            </a:extLst>
+          </p:cNvPr>
+          <p:cNvSpPr>
+            <a:spLocks noGrp="1"/>
+          </p:cNvSpPr>
+          <p:nvPr>
+            <p:ph idx="1"/>
+          </p:nvPr>
+        </p:nvSpPr>
+        <p:spPr/>
+        <p:txBody>
+          <a:bodyPr/>
+          <a:lstStyle/>
+          <a:p>
+            <a:pPr lvl="0"/>
+            <a:r>
+              <a:rPr lang="en-US"/>
+              <a:t>Click to edit Master text styles</a:t>
+            </a:r>
+          </a:p>
+          <a:p>
+            <a:pPr lvl="1"/>
+            <a:r>
+              <a:rPr lang="en-US"/>
+              <a:t>Second level</a:t>
+            </a:r>
+          </a:p>
+          <a:p>
+            <a:pPr lvl="2"/>
+            <a:r>
+              <a:rPr lang="en-US"/>
+              <a:t>Third level</a:t>
+            </a:r>
+          </a:p>
+          <a:p>
+            <a:pPr lvl="3"/>
+            <a:r>
+              <a:rPr lang="en-US"/>
+              <a:t>Fourth level</a:t>
+            </a:r>
+          </a:p>
+          <a:p>
+            <a:pPr lvl="4"/>
+            <a:r>
+              <a:rPr lang="en-US"/>
+              <a:t>Fifth level</a:t>
+            </a:r>
+          </a:p>
+        </p:txBody>
+      </p:sp>
+      <p:sp>
+        <p:nvSpPr>
+          <p:cNvPr id="4" name="Date Placeholder 3">
+            <a:extLst>
+              <a:ext uri="{FF2B5EF4-FFF2-40B4-BE49-F238E27FC236}">
+                <a16:creationId xmlns:a16="http://schemas.microsoft.com/office/drawing/2014/main" id="{556CCB1E-0B53-4E68-8EF2-9D93A4623D5A}"/>
+              </a:ext>
+            </a:extLst>
+          </p:cNvPr>
+          <p:cNvSpPr>
+            <a:spLocks noGrp="1"/>
+          </p:cNvSpPr>
+          <p:nvPr>
+            <p:ph type="dt" sz="half" idx="10"/>
+          </p:nvPr>
+        </p:nvSpPr>
+        <p:spPr/>
+        <p:txBody>
+          <a:bodyPr/>
+          <a:lstStyle/>
+          <a:p>
+            <a:fld id="{B55CAEFD-F031-424F-9422-B2C0B702207F}" type="datetimeFigureOut">
               <a:rPr lang="en-US" smtClean="0"/>
-              <a:t>Click to edit Master title style</a:t>
-            </a:r>
-            <a:endParaRPr lang="en-US"/>
-          </a:p>
-        </p:txBody>
-      </p:sp>
-      <p:sp>
-        <p:nvSpPr>
-          <p:cNvPr id="3" name="Content Placeholder 2"/>
-          <p:cNvSpPr>
-            <a:spLocks noGrp="1"/>
-          </p:cNvSpPr>
-          <p:nvPr>
-            <p:ph idx="1"/>
-          </p:nvPr>
-        </p:nvSpPr>
-        <p:spPr/>
-        <p:txBody>
-          <a:bodyPr/>
-          <a:lstStyle/>
-          <a:p>
-            <a:pPr lvl="0"/>
-            <a:r>
-              <a:rPr lang="en-US" smtClean="0"/>
-              <a:t>Click to edit Master text styles</a:t>
-            </a:r>
-          </a:p>
-          <a:p>
-            <a:pPr lvl="1"/>
-            <a:r>
-              <a:rPr lang="en-US" smtClean="0"/>
-              <a:t>Second level</a:t>
-            </a:r>
-          </a:p>
-          <a:p>
-            <a:pPr lvl="2"/>
-            <a:r>
-              <a:rPr lang="en-US" smtClean="0"/>
-              <a:t>Third level</a:t>
-            </a:r>
-          </a:p>
-          <a:p>
-            <a:pPr lvl="3"/>
-            <a:r>
-              <a:rPr lang="en-US" smtClean="0"/>
-              <a:t>Fourth level</a:t>
-            </a:r>
-          </a:p>
-          <a:p>
-            <a:pPr lvl="4"/>
-            <a:r>
-              <a:rPr lang="en-US" smtClean="0"/>
-              <a:t>Fifth level</a:t>
-            </a:r>
-            <a:endParaRPr lang="en-US"/>
-          </a:p>
-        </p:txBody>
-      </p:sp>
-      <p:sp>
-        <p:nvSpPr>
-          <p:cNvPr id="4" name="Date Placeholder 3"/>
-          <p:cNvSpPr>
-            <a:spLocks noGrp="1"/>
-          </p:cNvSpPr>
-          <p:nvPr>
-            <p:ph type="dt" sz="half" idx="10"/>
-          </p:nvPr>
-        </p:nvSpPr>
-        <p:spPr/>
-        <p:txBody>
-          <a:bodyPr/>
-          <a:lstStyle/>
-          <a:p>
-            <a:fld id="{5BCAD085-E8A6-8845-BD4E-CB4CCA059FC4}" type="datetimeFigureOut">
-              <a:rPr lang="en-US" smtClean="0"/>
-              <a:t>1/27/13</a:t>
+              <a:t>6/25/2021</a:t>
             </a:fld>
             <a:endParaRPr lang="en-US"/>
           </a:p>
@@ -816,7 +882,13 @@
       </p:sp>
       <p:sp>
         <p:nvSpPr>
-          <p:cNvPr id="5" name="Footer Placeholder 4"/>
+          <p:cNvPr id="5" name="Footer Placeholder 4">
+            <a:extLst>
+              <a:ext uri="{FF2B5EF4-FFF2-40B4-BE49-F238E27FC236}">
+                <a16:creationId xmlns:a16="http://schemas.microsoft.com/office/drawing/2014/main" id="{B6885A92-10BB-4E7D-BDF5-1B26D604A945}"/>
+              </a:ext>
+            </a:extLst>
+          </p:cNvPr>
           <p:cNvSpPr>
             <a:spLocks noGrp="1"/>
           </p:cNvSpPr>
@@ -835,7 +907,13 @@
       </p:sp>
       <p:sp>
         <p:nvSpPr>
-          <p:cNvPr id="6" name="Slide Number Placeholder 5"/>
+          <p:cNvPr id="6" name="Slide Number Placeholder 5">
+            <a:extLst>
+              <a:ext uri="{FF2B5EF4-FFF2-40B4-BE49-F238E27FC236}">
+                <a16:creationId xmlns:a16="http://schemas.microsoft.com/office/drawing/2014/main" id="{108AAAED-19CE-47AE-B6FA-64BA969DFCFB}"/>
+              </a:ext>
+            </a:extLst>
+          </p:cNvPr>
           <p:cNvSpPr>
             <a:spLocks noGrp="1"/>
           </p:cNvSpPr>
@@ -848,7 +926,7 @@
           <a:bodyPr/>
           <a:lstStyle/>
           <a:p>
-            <a:fld id="{C1FF6DA9-008F-8B48-92A6-B652298478BF}" type="slidenum">
+            <a:fld id="{8951AC35-B36C-4D75-A6AF-F09D66D83A88}" type="slidenum">
               <a:rPr lang="en-US" smtClean="0"/>
               <a:t>‹#›</a:t>
             </a:fld>
@@ -859,7 +937,7 @@
     </p:spTree>
     <p:extLst>
       <p:ext uri="{BB962C8B-B14F-4D97-AF65-F5344CB8AC3E}">
-        <p14:creationId xmlns:p14="http://schemas.microsoft.com/office/powerpoint/2010/main" val="2614314258"/>
+        <p14:creationId xmlns:p14="http://schemas.microsoft.com/office/powerpoint/2010/main" val="3512141361"/>
       </p:ext>
     </p:extLst>
   </p:cSld>
@@ -888,7 +966,13 @@
       </p:grpSpPr>
       <p:sp>
         <p:nvSpPr>
-          <p:cNvPr id="2" name="Title 1"/>
+          <p:cNvPr id="2" name="Title 1">
+            <a:extLst>
+              <a:ext uri="{FF2B5EF4-FFF2-40B4-BE49-F238E27FC236}">
+                <a16:creationId xmlns:a16="http://schemas.microsoft.com/office/drawing/2014/main" id="{255D599B-E06E-4FA7-8A06-6D331C3C3BDC}"/>
+              </a:ext>
+            </a:extLst>
+          </p:cNvPr>
           <p:cNvSpPr>
             <a:spLocks noGrp="1"/>
           </p:cNvSpPr>
@@ -898,29 +982,34 @@
         </p:nvSpPr>
         <p:spPr>
           <a:xfrm>
-            <a:off x="722313" y="4406900"/>
-            <a:ext cx="7772400" cy="1362075"/>
-          </a:xfrm>
-        </p:spPr>
-        <p:txBody>
-          <a:bodyPr anchor="t"/>
+            <a:off x="831850" y="1709738"/>
+            <a:ext cx="10515600" cy="2852737"/>
+          </a:xfrm>
+        </p:spPr>
+        <p:txBody>
+          <a:bodyPr anchor="b"/>
           <a:lstStyle>
-            <a:lvl1pPr algn="l">
-              <a:defRPr sz="4000" b="1" cap="all"/>
+            <a:lvl1pPr>
+              <a:defRPr sz="6000"/>
             </a:lvl1pPr>
           </a:lstStyle>
           <a:p>
             <a:r>
-              <a:rPr lang="en-US" smtClean="0"/>
+              <a:rPr lang="en-US"/>
               <a:t>Click to edit Master title style</a:t>
             </a:r>
-            <a:endParaRPr lang="en-US"/>
-          </a:p>
-        </p:txBody>
-      </p:sp>
-      <p:sp>
-        <p:nvSpPr>
-          <p:cNvPr id="3" name="Text Placeholder 2"/>
+          </a:p>
+        </p:txBody>
+      </p:sp>
+      <p:sp>
+        <p:nvSpPr>
+          <p:cNvPr id="3" name="Text Placeholder 2">
+            <a:extLst>
+              <a:ext uri="{FF2B5EF4-FFF2-40B4-BE49-F238E27FC236}">
+                <a16:creationId xmlns:a16="http://schemas.microsoft.com/office/drawing/2014/main" id="{588A7D03-27EA-467D-95EC-8200B92ECE5C}"/>
+              </a:ext>
+            </a:extLst>
+          </p:cNvPr>
           <p:cNvSpPr>
             <a:spLocks noGrp="1"/>
           </p:cNvSpPr>
@@ -930,16 +1019,16 @@
         </p:nvSpPr>
         <p:spPr>
           <a:xfrm>
-            <a:off x="722313" y="2906713"/>
-            <a:ext cx="7772400" cy="1500187"/>
-          </a:xfrm>
-        </p:spPr>
-        <p:txBody>
-          <a:bodyPr anchor="b"/>
+            <a:off x="831850" y="4589463"/>
+            <a:ext cx="10515600" cy="1500187"/>
+          </a:xfrm>
+        </p:spPr>
+        <p:txBody>
+          <a:bodyPr/>
           <a:lstStyle>
             <a:lvl1pPr marL="0" indent="0">
               <a:buNone/>
-              <a:defRPr sz="2000">
+              <a:defRPr sz="2400">
                 <a:solidFill>
                   <a:schemeClr val="tx1">
                     <a:tint val="75000"/>
@@ -949,7 +1038,7 @@
             </a:lvl1pPr>
             <a:lvl2pPr marL="457200" indent="0">
               <a:buNone/>
-              <a:defRPr sz="1800">
+              <a:defRPr sz="2000">
                 <a:solidFill>
                   <a:schemeClr val="tx1">
                     <a:tint val="75000"/>
@@ -959,7 +1048,7 @@
             </a:lvl2pPr>
             <a:lvl3pPr marL="914400" indent="0">
               <a:buNone/>
-              <a:defRPr sz="1600">
+              <a:defRPr sz="1800">
                 <a:solidFill>
                   <a:schemeClr val="tx1">
                     <a:tint val="75000"/>
@@ -969,7 +1058,7 @@
             </a:lvl3pPr>
             <a:lvl4pPr marL="1371600" indent="0">
               <a:buNone/>
-              <a:defRPr sz="1400">
+              <a:defRPr sz="1600">
                 <a:solidFill>
                   <a:schemeClr val="tx1">
                     <a:tint val="75000"/>
@@ -979,7 +1068,7 @@
             </a:lvl4pPr>
             <a:lvl5pPr marL="1828800" indent="0">
               <a:buNone/>
-              <a:defRPr sz="1400">
+              <a:defRPr sz="1600">
                 <a:solidFill>
                   <a:schemeClr val="tx1">
                     <a:tint val="75000"/>
@@ -989,7 +1078,7 @@
             </a:lvl5pPr>
             <a:lvl6pPr marL="2286000" indent="0">
               <a:buNone/>
-              <a:defRPr sz="1400">
+              <a:defRPr sz="1600">
                 <a:solidFill>
                   <a:schemeClr val="tx1">
                     <a:tint val="75000"/>
@@ -999,7 +1088,7 @@
             </a:lvl6pPr>
             <a:lvl7pPr marL="2743200" indent="0">
               <a:buNone/>
-              <a:defRPr sz="1400">
+              <a:defRPr sz="1600">
                 <a:solidFill>
                   <a:schemeClr val="tx1">
                     <a:tint val="75000"/>
@@ -1009,7 +1098,7 @@
             </a:lvl7pPr>
             <a:lvl8pPr marL="3200400" indent="0">
               <a:buNone/>
-              <a:defRPr sz="1400">
+              <a:defRPr sz="1600">
                 <a:solidFill>
                   <a:schemeClr val="tx1">
                     <a:tint val="75000"/>
@@ -1019,7 +1108,7 @@
             </a:lvl8pPr>
             <a:lvl9pPr marL="3657600" indent="0">
               <a:buNone/>
-              <a:defRPr sz="1400">
+              <a:defRPr sz="1600">
                 <a:solidFill>
                   <a:schemeClr val="tx1">
                     <a:tint val="75000"/>
@@ -1031,30 +1120,36 @@
           <a:p>
             <a:pPr lvl="0"/>
             <a:r>
+              <a:rPr lang="en-US"/>
+              <a:t>Click to edit Master text styles</a:t>
+            </a:r>
+          </a:p>
+        </p:txBody>
+      </p:sp>
+      <p:sp>
+        <p:nvSpPr>
+          <p:cNvPr id="4" name="Date Placeholder 3">
+            <a:extLst>
+              <a:ext uri="{FF2B5EF4-FFF2-40B4-BE49-F238E27FC236}">
+                <a16:creationId xmlns:a16="http://schemas.microsoft.com/office/drawing/2014/main" id="{0B4888CC-310C-434F-93F1-032F8C05BF64}"/>
+              </a:ext>
+            </a:extLst>
+          </p:cNvPr>
+          <p:cNvSpPr>
+            <a:spLocks noGrp="1"/>
+          </p:cNvSpPr>
+          <p:nvPr>
+            <p:ph type="dt" sz="half" idx="10"/>
+          </p:nvPr>
+        </p:nvSpPr>
+        <p:spPr/>
+        <p:txBody>
+          <a:bodyPr/>
+          <a:lstStyle/>
+          <a:p>
+            <a:fld id="{B55CAEFD-F031-424F-9422-B2C0B702207F}" type="datetimeFigureOut">
               <a:rPr lang="en-US" smtClean="0"/>
-              <a:t>Click to edit Master text styles</a:t>
-            </a:r>
-          </a:p>
-        </p:txBody>
-      </p:sp>
-      <p:sp>
-        <p:nvSpPr>
-          <p:cNvPr id="4" name="Date Placeholder 3"/>
-          <p:cNvSpPr>
-            <a:spLocks noGrp="1"/>
-          </p:cNvSpPr>
-          <p:nvPr>
-            <p:ph type="dt" sz="half" idx="10"/>
-          </p:nvPr>
-        </p:nvSpPr>
-        <p:spPr/>
-        <p:txBody>
-          <a:bodyPr/>
-          <a:lstStyle/>
-          <a:p>
-            <a:fld id="{5BCAD085-E8A6-8845-BD4E-CB4CCA059FC4}" type="datetimeFigureOut">
-              <a:rPr lang="en-US" smtClean="0"/>
-              <a:t>1/27/13</a:t>
+              <a:t>6/25/2021</a:t>
             </a:fld>
             <a:endParaRPr lang="en-US"/>
           </a:p>
@@ -1062,7 +1157,13 @@
       </p:sp>
       <p:sp>
         <p:nvSpPr>
-          <p:cNvPr id="5" name="Footer Placeholder 4"/>
+          <p:cNvPr id="5" name="Footer Placeholder 4">
+            <a:extLst>
+              <a:ext uri="{FF2B5EF4-FFF2-40B4-BE49-F238E27FC236}">
+                <a16:creationId xmlns:a16="http://schemas.microsoft.com/office/drawing/2014/main" id="{519B413E-C5ED-462B-A3A4-5DC0878A9F54}"/>
+              </a:ext>
+            </a:extLst>
+          </p:cNvPr>
           <p:cNvSpPr>
             <a:spLocks noGrp="1"/>
           </p:cNvSpPr>
@@ -1081,7 +1182,13 @@
       </p:sp>
       <p:sp>
         <p:nvSpPr>
-          <p:cNvPr id="6" name="Slide Number Placeholder 5"/>
+          <p:cNvPr id="6" name="Slide Number Placeholder 5">
+            <a:extLst>
+              <a:ext uri="{FF2B5EF4-FFF2-40B4-BE49-F238E27FC236}">
+                <a16:creationId xmlns:a16="http://schemas.microsoft.com/office/drawing/2014/main" id="{149F6656-909B-4361-9AB5-17290FEE351C}"/>
+              </a:ext>
+            </a:extLst>
+          </p:cNvPr>
           <p:cNvSpPr>
             <a:spLocks noGrp="1"/>
           </p:cNvSpPr>
@@ -1094,7 +1201,7 @@
           <a:bodyPr/>
           <a:lstStyle/>
           <a:p>
-            <a:fld id="{C1FF6DA9-008F-8B48-92A6-B652298478BF}" type="slidenum">
+            <a:fld id="{8951AC35-B36C-4D75-A6AF-F09D66D83A88}" type="slidenum">
               <a:rPr lang="en-US" smtClean="0"/>
               <a:t>‹#›</a:t>
             </a:fld>
@@ -1105,7 +1212,7 @@
     </p:spTree>
     <p:extLst>
       <p:ext uri="{BB962C8B-B14F-4D97-AF65-F5344CB8AC3E}">
-        <p14:creationId xmlns:p14="http://schemas.microsoft.com/office/powerpoint/2010/main" val="960648375"/>
+        <p14:creationId xmlns:p14="http://schemas.microsoft.com/office/powerpoint/2010/main" val="2730087179"/>
       </p:ext>
     </p:extLst>
   </p:cSld>
@@ -1134,7 +1241,13 @@
       </p:grpSpPr>
       <p:sp>
         <p:nvSpPr>
-          <p:cNvPr id="2" name="Title 1"/>
+          <p:cNvPr id="2" name="Title 1">
+            <a:extLst>
+              <a:ext uri="{FF2B5EF4-FFF2-40B4-BE49-F238E27FC236}">
+                <a16:creationId xmlns:a16="http://schemas.microsoft.com/office/drawing/2014/main" id="{7A5CFB45-2E73-47C5-A664-C917F6815A8D}"/>
+              </a:ext>
+            </a:extLst>
+          </p:cNvPr>
           <p:cNvSpPr>
             <a:spLocks noGrp="1"/>
           </p:cNvSpPr>
@@ -1148,201 +1261,160 @@
           <a:lstStyle/>
           <a:p>
             <a:r>
+              <a:rPr lang="en-US"/>
+              <a:t>Click to edit Master title style</a:t>
+            </a:r>
+          </a:p>
+        </p:txBody>
+      </p:sp>
+      <p:sp>
+        <p:nvSpPr>
+          <p:cNvPr id="3" name="Content Placeholder 2">
+            <a:extLst>
+              <a:ext uri="{FF2B5EF4-FFF2-40B4-BE49-F238E27FC236}">
+                <a16:creationId xmlns:a16="http://schemas.microsoft.com/office/drawing/2014/main" id="{D52F9F7D-E91E-4B7B-9159-DD73367FB60D}"/>
+              </a:ext>
+            </a:extLst>
+          </p:cNvPr>
+          <p:cNvSpPr>
+            <a:spLocks noGrp="1"/>
+          </p:cNvSpPr>
+          <p:nvPr>
+            <p:ph sz="half" idx="1"/>
+          </p:nvPr>
+        </p:nvSpPr>
+        <p:spPr>
+          <a:xfrm>
+            <a:off x="838200" y="1825625"/>
+            <a:ext cx="5181600" cy="4351338"/>
+          </a:xfrm>
+        </p:spPr>
+        <p:txBody>
+          <a:bodyPr/>
+          <a:lstStyle/>
+          <a:p>
+            <a:pPr lvl="0"/>
+            <a:r>
+              <a:rPr lang="en-US"/>
+              <a:t>Click to edit Master text styles</a:t>
+            </a:r>
+          </a:p>
+          <a:p>
+            <a:pPr lvl="1"/>
+            <a:r>
+              <a:rPr lang="en-US"/>
+              <a:t>Second level</a:t>
+            </a:r>
+          </a:p>
+          <a:p>
+            <a:pPr lvl="2"/>
+            <a:r>
+              <a:rPr lang="en-US"/>
+              <a:t>Third level</a:t>
+            </a:r>
+          </a:p>
+          <a:p>
+            <a:pPr lvl="3"/>
+            <a:r>
+              <a:rPr lang="en-US"/>
+              <a:t>Fourth level</a:t>
+            </a:r>
+          </a:p>
+          <a:p>
+            <a:pPr lvl="4"/>
+            <a:r>
+              <a:rPr lang="en-US"/>
+              <a:t>Fifth level</a:t>
+            </a:r>
+          </a:p>
+        </p:txBody>
+      </p:sp>
+      <p:sp>
+        <p:nvSpPr>
+          <p:cNvPr id="4" name="Content Placeholder 3">
+            <a:extLst>
+              <a:ext uri="{FF2B5EF4-FFF2-40B4-BE49-F238E27FC236}">
+                <a16:creationId xmlns:a16="http://schemas.microsoft.com/office/drawing/2014/main" id="{B9A128E4-1383-4033-BBE1-244CFB0925E2}"/>
+              </a:ext>
+            </a:extLst>
+          </p:cNvPr>
+          <p:cNvSpPr>
+            <a:spLocks noGrp="1"/>
+          </p:cNvSpPr>
+          <p:nvPr>
+            <p:ph sz="half" idx="2"/>
+          </p:nvPr>
+        </p:nvSpPr>
+        <p:spPr>
+          <a:xfrm>
+            <a:off x="6172200" y="1825625"/>
+            <a:ext cx="5181600" cy="4351338"/>
+          </a:xfrm>
+        </p:spPr>
+        <p:txBody>
+          <a:bodyPr/>
+          <a:lstStyle/>
+          <a:p>
+            <a:pPr lvl="0"/>
+            <a:r>
+              <a:rPr lang="en-US"/>
+              <a:t>Click to edit Master text styles</a:t>
+            </a:r>
+          </a:p>
+          <a:p>
+            <a:pPr lvl="1"/>
+            <a:r>
+              <a:rPr lang="en-US"/>
+              <a:t>Second level</a:t>
+            </a:r>
+          </a:p>
+          <a:p>
+            <a:pPr lvl="2"/>
+            <a:r>
+              <a:rPr lang="en-US"/>
+              <a:t>Third level</a:t>
+            </a:r>
+          </a:p>
+          <a:p>
+            <a:pPr lvl="3"/>
+            <a:r>
+              <a:rPr lang="en-US"/>
+              <a:t>Fourth level</a:t>
+            </a:r>
+          </a:p>
+          <a:p>
+            <a:pPr lvl="4"/>
+            <a:r>
+              <a:rPr lang="en-US"/>
+              <a:t>Fifth level</a:t>
+            </a:r>
+          </a:p>
+        </p:txBody>
+      </p:sp>
+      <p:sp>
+        <p:nvSpPr>
+          <p:cNvPr id="5" name="Date Placeholder 4">
+            <a:extLst>
+              <a:ext uri="{FF2B5EF4-FFF2-40B4-BE49-F238E27FC236}">
+                <a16:creationId xmlns:a16="http://schemas.microsoft.com/office/drawing/2014/main" id="{5545B4F6-70EE-4B61-8E27-9EF2D98A8C04}"/>
+              </a:ext>
+            </a:extLst>
+          </p:cNvPr>
+          <p:cNvSpPr>
+            <a:spLocks noGrp="1"/>
+          </p:cNvSpPr>
+          <p:nvPr>
+            <p:ph type="dt" sz="half" idx="10"/>
+          </p:nvPr>
+        </p:nvSpPr>
+        <p:spPr/>
+        <p:txBody>
+          <a:bodyPr/>
+          <a:lstStyle/>
+          <a:p>
+            <a:fld id="{B55CAEFD-F031-424F-9422-B2C0B702207F}" type="datetimeFigureOut">
               <a:rPr lang="en-US" smtClean="0"/>
-              <a:t>Click to edit Master title style</a:t>
-            </a:r>
-            <a:endParaRPr lang="en-US"/>
-          </a:p>
-        </p:txBody>
-      </p:sp>
-      <p:sp>
-        <p:nvSpPr>
-          <p:cNvPr id="3" name="Content Placeholder 2"/>
-          <p:cNvSpPr>
-            <a:spLocks noGrp="1"/>
-          </p:cNvSpPr>
-          <p:nvPr>
-            <p:ph sz="half" idx="1"/>
-          </p:nvPr>
-        </p:nvSpPr>
-        <p:spPr>
-          <a:xfrm>
-            <a:off x="457200" y="1600200"/>
-            <a:ext cx="4038600" cy="4525963"/>
-          </a:xfrm>
-        </p:spPr>
-        <p:txBody>
-          <a:bodyPr/>
-          <a:lstStyle>
-            <a:lvl1pPr>
-              <a:defRPr sz="2800"/>
-            </a:lvl1pPr>
-            <a:lvl2pPr>
-              <a:defRPr sz="2400"/>
-            </a:lvl2pPr>
-            <a:lvl3pPr>
-              <a:defRPr sz="2000"/>
-            </a:lvl3pPr>
-            <a:lvl4pPr>
-              <a:defRPr sz="1800"/>
-            </a:lvl4pPr>
-            <a:lvl5pPr>
-              <a:defRPr sz="1800"/>
-            </a:lvl5pPr>
-            <a:lvl6pPr>
-              <a:defRPr sz="1800"/>
-            </a:lvl6pPr>
-            <a:lvl7pPr>
-              <a:defRPr sz="1800"/>
-            </a:lvl7pPr>
-            <a:lvl8pPr>
-              <a:defRPr sz="1800"/>
-            </a:lvl8pPr>
-            <a:lvl9pPr>
-              <a:defRPr sz="1800"/>
-            </a:lvl9pPr>
-          </a:lstStyle>
-          <a:p>
-            <a:pPr lvl="0"/>
-            <a:r>
-              <a:rPr lang="en-US" smtClean="0"/>
-              <a:t>Click to edit Master text styles</a:t>
-            </a:r>
-          </a:p>
-          <a:p>
-            <a:pPr lvl="1"/>
-            <a:r>
-              <a:rPr lang="en-US" smtClean="0"/>
-              <a:t>Second level</a:t>
-            </a:r>
-          </a:p>
-          <a:p>
-            <a:pPr lvl="2"/>
-            <a:r>
-              <a:rPr lang="en-US" smtClean="0"/>
-              <a:t>Third level</a:t>
-            </a:r>
-          </a:p>
-          <a:p>
-            <a:pPr lvl="3"/>
-            <a:r>
-              <a:rPr lang="en-US" smtClean="0"/>
-              <a:t>Fourth level</a:t>
-            </a:r>
-          </a:p>
-          <a:p>
-            <a:pPr lvl="4"/>
-            <a:r>
-              <a:rPr lang="en-US" smtClean="0"/>
-              <a:t>Fifth level</a:t>
-            </a:r>
-            <a:endParaRPr lang="en-US"/>
-          </a:p>
-        </p:txBody>
-      </p:sp>
-      <p:sp>
-        <p:nvSpPr>
-          <p:cNvPr id="4" name="Content Placeholder 3"/>
-          <p:cNvSpPr>
-            <a:spLocks noGrp="1"/>
-          </p:cNvSpPr>
-          <p:nvPr>
-            <p:ph sz="half" idx="2"/>
-          </p:nvPr>
-        </p:nvSpPr>
-        <p:spPr>
-          <a:xfrm>
-            <a:off x="4648200" y="1600200"/>
-            <a:ext cx="4038600" cy="4525963"/>
-          </a:xfrm>
-        </p:spPr>
-        <p:txBody>
-          <a:bodyPr/>
-          <a:lstStyle>
-            <a:lvl1pPr>
-              <a:defRPr sz="2800"/>
-            </a:lvl1pPr>
-            <a:lvl2pPr>
-              <a:defRPr sz="2400"/>
-            </a:lvl2pPr>
-            <a:lvl3pPr>
-              <a:defRPr sz="2000"/>
-            </a:lvl3pPr>
-            <a:lvl4pPr>
-              <a:defRPr sz="1800"/>
-            </a:lvl4pPr>
-            <a:lvl5pPr>
-              <a:defRPr sz="1800"/>
-            </a:lvl5pPr>
-            <a:lvl6pPr>
-              <a:defRPr sz="1800"/>
-            </a:lvl6pPr>
-            <a:lvl7pPr>
-              <a:defRPr sz="1800"/>
-            </a:lvl7pPr>
-            <a:lvl8pPr>
-              <a:defRPr sz="1800"/>
-            </a:lvl8pPr>
-            <a:lvl9pPr>
-              <a:defRPr sz="1800"/>
-            </a:lvl9pPr>
-          </a:lstStyle>
-          <a:p>
-            <a:pPr lvl="0"/>
-            <a:r>
-              <a:rPr lang="en-US" smtClean="0"/>
-              <a:t>Click to edit Master text styles</a:t>
-            </a:r>
-          </a:p>
-          <a:p>
-            <a:pPr lvl="1"/>
-            <a:r>
-              <a:rPr lang="en-US" smtClean="0"/>
-              <a:t>Second level</a:t>
-            </a:r>
-          </a:p>
-          <a:p>
-            <a:pPr lvl="2"/>
-            <a:r>
-              <a:rPr lang="en-US" smtClean="0"/>
-              <a:t>Third level</a:t>
-            </a:r>
-          </a:p>
-          <a:p>
-            <a:pPr lvl="3"/>
-            <a:r>
-              <a:rPr lang="en-US" smtClean="0"/>
-              <a:t>Fourth level</a:t>
-            </a:r>
-          </a:p>
-          <a:p>
-            <a:pPr lvl="4"/>
-            <a:r>
-              <a:rPr lang="en-US" smtClean="0"/>
-              <a:t>Fifth level</a:t>
-            </a:r>
-            <a:endParaRPr lang="en-US"/>
-          </a:p>
-        </p:txBody>
-      </p:sp>
-      <p:sp>
-        <p:nvSpPr>
-          <p:cNvPr id="5" name="Date Placeholder 4"/>
-          <p:cNvSpPr>
-            <a:spLocks noGrp="1"/>
-          </p:cNvSpPr>
-          <p:nvPr>
-            <p:ph type="dt" sz="half" idx="10"/>
-          </p:nvPr>
-        </p:nvSpPr>
-        <p:spPr/>
-        <p:txBody>
-          <a:bodyPr/>
-          <a:lstStyle/>
-          <a:p>
-            <a:fld id="{5BCAD085-E8A6-8845-BD4E-CB4CCA059FC4}" type="datetimeFigureOut">
-              <a:rPr lang="en-US" smtClean="0"/>
-              <a:t>1/27/13</a:t>
+              <a:t>6/25/2021</a:t>
             </a:fld>
             <a:endParaRPr lang="en-US"/>
           </a:p>
@@ -1350,7 +1422,13 @@
       </p:sp>
       <p:sp>
         <p:nvSpPr>
-          <p:cNvPr id="6" name="Footer Placeholder 5"/>
+          <p:cNvPr id="6" name="Footer Placeholder 5">
+            <a:extLst>
+              <a:ext uri="{FF2B5EF4-FFF2-40B4-BE49-F238E27FC236}">
+                <a16:creationId xmlns:a16="http://schemas.microsoft.com/office/drawing/2014/main" id="{9A12F6E8-F91C-4938-AC1E-3506620F7EA4}"/>
+              </a:ext>
+            </a:extLst>
+          </p:cNvPr>
           <p:cNvSpPr>
             <a:spLocks noGrp="1"/>
           </p:cNvSpPr>
@@ -1369,7 +1447,13 @@
       </p:sp>
       <p:sp>
         <p:nvSpPr>
-          <p:cNvPr id="7" name="Slide Number Placeholder 6"/>
+          <p:cNvPr id="7" name="Slide Number Placeholder 6">
+            <a:extLst>
+              <a:ext uri="{FF2B5EF4-FFF2-40B4-BE49-F238E27FC236}">
+                <a16:creationId xmlns:a16="http://schemas.microsoft.com/office/drawing/2014/main" id="{91D843E7-5CF3-453A-9E89-771B4C11CAA2}"/>
+              </a:ext>
+            </a:extLst>
+          </p:cNvPr>
           <p:cNvSpPr>
             <a:spLocks noGrp="1"/>
           </p:cNvSpPr>
@@ -1382,7 +1466,7 @@
           <a:bodyPr/>
           <a:lstStyle/>
           <a:p>
-            <a:fld id="{C1FF6DA9-008F-8B48-92A6-B652298478BF}" type="slidenum">
+            <a:fld id="{8951AC35-B36C-4D75-A6AF-F09D66D83A88}" type="slidenum">
               <a:rPr lang="en-US" smtClean="0"/>
               <a:t>‹#›</a:t>
             </a:fld>
@@ -1393,7 +1477,7 @@
     </p:spTree>
     <p:extLst>
       <p:ext uri="{BB962C8B-B14F-4D97-AF65-F5344CB8AC3E}">
-        <p14:creationId xmlns:p14="http://schemas.microsoft.com/office/powerpoint/2010/main" val="2782244947"/>
+        <p14:creationId xmlns:p14="http://schemas.microsoft.com/office/powerpoint/2010/main" val="1713987036"/>
       </p:ext>
     </p:extLst>
   </p:cSld>
@@ -1422,7 +1506,13 @@
       </p:grpSpPr>
       <p:sp>
         <p:nvSpPr>
-          <p:cNvPr id="2" name="Title 1"/>
+          <p:cNvPr id="2" name="Title 1">
+            <a:extLst>
+              <a:ext uri="{FF2B5EF4-FFF2-40B4-BE49-F238E27FC236}">
+                <a16:creationId xmlns:a16="http://schemas.microsoft.com/office/drawing/2014/main" id="{29378780-9D01-44C5-85A4-FA658FFABD8B}"/>
+              </a:ext>
+            </a:extLst>
+          </p:cNvPr>
           <p:cNvSpPr>
             <a:spLocks noGrp="1"/>
           </p:cNvSpPr>
@@ -1430,26 +1520,32 @@
             <p:ph type="title"/>
           </p:nvPr>
         </p:nvSpPr>
-        <p:spPr/>
+        <p:spPr>
+          <a:xfrm>
+            <a:off x="839788" y="365125"/>
+            <a:ext cx="10515600" cy="1325563"/>
+          </a:xfrm>
+        </p:spPr>
         <p:txBody>
           <a:bodyPr/>
-          <a:lstStyle>
-            <a:lvl1pPr>
-              <a:defRPr/>
-            </a:lvl1pPr>
-          </a:lstStyle>
-          <a:p>
-            <a:r>
-              <a:rPr lang="en-US" smtClean="0"/>
+          <a:lstStyle/>
+          <a:p>
+            <a:r>
+              <a:rPr lang="en-US"/>
               <a:t>Click to edit Master title style</a:t>
             </a:r>
-            <a:endParaRPr lang="en-US"/>
-          </a:p>
-        </p:txBody>
-      </p:sp>
-      <p:sp>
-        <p:nvSpPr>
-          <p:cNvPr id="3" name="Text Placeholder 2"/>
+          </a:p>
+        </p:txBody>
+      </p:sp>
+      <p:sp>
+        <p:nvSpPr>
+          <p:cNvPr id="3" name="Text Placeholder 2">
+            <a:extLst>
+              <a:ext uri="{FF2B5EF4-FFF2-40B4-BE49-F238E27FC236}">
+                <a16:creationId xmlns:a16="http://schemas.microsoft.com/office/drawing/2014/main" id="{2FC2C1B3-9375-4D50-9CB4-117CF91C1E9C}"/>
+              </a:ext>
+            </a:extLst>
+          </p:cNvPr>
           <p:cNvSpPr>
             <a:spLocks noGrp="1"/>
           </p:cNvSpPr>
@@ -1459,8 +1555,8 @@
         </p:nvSpPr>
         <p:spPr>
           <a:xfrm>
-            <a:off x="457200" y="1535113"/>
-            <a:ext cx="4040188" cy="639762"/>
+            <a:off x="839788" y="1681163"/>
+            <a:ext cx="5157787" cy="823912"/>
           </a:xfrm>
         </p:spPr>
         <p:txBody>
@@ -1506,7 +1602,7 @@
           <a:p>
             <a:pPr lvl="0"/>
             <a:r>
-              <a:rPr lang="en-US" smtClean="0"/>
+              <a:rPr lang="en-US"/>
               <a:t>Click to edit Master text styles</a:t>
             </a:r>
           </a:p>
@@ -1514,7 +1610,13 @@
       </p:sp>
       <p:sp>
         <p:nvSpPr>
-          <p:cNvPr id="4" name="Content Placeholder 3"/>
+          <p:cNvPr id="4" name="Content Placeholder 3">
+            <a:extLst>
+              <a:ext uri="{FF2B5EF4-FFF2-40B4-BE49-F238E27FC236}">
+                <a16:creationId xmlns:a16="http://schemas.microsoft.com/office/drawing/2014/main" id="{CBDF1DF8-572F-4BAB-B870-3D6BA05E359C}"/>
+              </a:ext>
+            </a:extLst>
+          </p:cNvPr>
           <p:cNvSpPr>
             <a:spLocks noGrp="1"/>
           </p:cNvSpPr>
@@ -1524,82 +1626,59 @@
         </p:nvSpPr>
         <p:spPr>
           <a:xfrm>
-            <a:off x="457200" y="2174875"/>
-            <a:ext cx="4040188" cy="3951288"/>
+            <a:off x="839788" y="2505075"/>
+            <a:ext cx="5157787" cy="3684588"/>
           </a:xfrm>
         </p:spPr>
         <p:txBody>
           <a:bodyPr/>
-          <a:lstStyle>
-            <a:lvl1pPr>
-              <a:defRPr sz="2400"/>
-            </a:lvl1pPr>
-            <a:lvl2pPr>
-              <a:defRPr sz="2000"/>
-            </a:lvl2pPr>
-            <a:lvl3pPr>
-              <a:defRPr sz="1800"/>
-            </a:lvl3pPr>
-            <a:lvl4pPr>
-              <a:defRPr sz="1600"/>
-            </a:lvl4pPr>
-            <a:lvl5pPr>
-              <a:defRPr sz="1600"/>
-            </a:lvl5pPr>
-            <a:lvl6pPr>
-              <a:defRPr sz="1600"/>
-            </a:lvl6pPr>
-            <a:lvl7pPr>
-              <a:defRPr sz="1600"/>
-            </a:lvl7pPr>
-            <a:lvl8pPr>
-              <a:defRPr sz="1600"/>
-            </a:lvl8pPr>
-            <a:lvl9pPr>
-              <a:defRPr sz="1600"/>
-            </a:lvl9pPr>
-          </a:lstStyle>
+          <a:lstStyle/>
           <a:p>
             <a:pPr lvl="0"/>
             <a:r>
-              <a:rPr lang="en-US" smtClean="0"/>
+              <a:rPr lang="en-US"/>
               <a:t>Click to edit Master text styles</a:t>
             </a:r>
           </a:p>
           <a:p>
             <a:pPr lvl="1"/>
             <a:r>
-              <a:rPr lang="en-US" smtClean="0"/>
+              <a:rPr lang="en-US"/>
               <a:t>Second level</a:t>
             </a:r>
           </a:p>
           <a:p>
             <a:pPr lvl="2"/>
             <a:r>
-              <a:rPr lang="en-US" smtClean="0"/>
+              <a:rPr lang="en-US"/>
               <a:t>Third level</a:t>
             </a:r>
           </a:p>
           <a:p>
             <a:pPr lvl="3"/>
             <a:r>
-              <a:rPr lang="en-US" smtClean="0"/>
+              <a:rPr lang="en-US"/>
               <a:t>Fourth level</a:t>
             </a:r>
           </a:p>
           <a:p>
             <a:pPr lvl="4"/>
             <a:r>
-              <a:rPr lang="en-US" smtClean="0"/>
+              <a:rPr lang="en-US"/>
               <a:t>Fifth level</a:t>
             </a:r>
-            <a:endParaRPr lang="en-US"/>
-          </a:p>
-        </p:txBody>
-      </p:sp>
-      <p:sp>
-        <p:nvSpPr>
-          <p:cNvPr id="5" name="Text Placeholder 4"/>
+          </a:p>
+        </p:txBody>
+      </p:sp>
+      <p:sp>
+        <p:nvSpPr>
+          <p:cNvPr id="5" name="Text Placeholder 4">
+            <a:extLst>
+              <a:ext uri="{FF2B5EF4-FFF2-40B4-BE49-F238E27FC236}">
+                <a16:creationId xmlns:a16="http://schemas.microsoft.com/office/drawing/2014/main" id="{C55EBFB6-A27D-4A1D-9B0A-21C4A515A22B}"/>
+              </a:ext>
+            </a:extLst>
+          </p:cNvPr>
           <p:cNvSpPr>
             <a:spLocks noGrp="1"/>
           </p:cNvSpPr>
@@ -1609,8 +1688,8 @@
         </p:nvSpPr>
         <p:spPr>
           <a:xfrm>
-            <a:off x="4645025" y="1535113"/>
-            <a:ext cx="4041775" cy="639762"/>
+            <a:off x="6172200" y="1681163"/>
+            <a:ext cx="5183188" cy="823912"/>
           </a:xfrm>
         </p:spPr>
         <p:txBody>
@@ -1656,115 +1735,98 @@
           <a:p>
             <a:pPr lvl="0"/>
             <a:r>
+              <a:rPr lang="en-US"/>
+              <a:t>Click to edit Master text styles</a:t>
+            </a:r>
+          </a:p>
+        </p:txBody>
+      </p:sp>
+      <p:sp>
+        <p:nvSpPr>
+          <p:cNvPr id="6" name="Content Placeholder 5">
+            <a:extLst>
+              <a:ext uri="{FF2B5EF4-FFF2-40B4-BE49-F238E27FC236}">
+                <a16:creationId xmlns:a16="http://schemas.microsoft.com/office/drawing/2014/main" id="{6481E3F6-565F-4C93-B42C-CAE6AE802EC3}"/>
+              </a:ext>
+            </a:extLst>
+          </p:cNvPr>
+          <p:cNvSpPr>
+            <a:spLocks noGrp="1"/>
+          </p:cNvSpPr>
+          <p:nvPr>
+            <p:ph sz="quarter" idx="4"/>
+          </p:nvPr>
+        </p:nvSpPr>
+        <p:spPr>
+          <a:xfrm>
+            <a:off x="6172200" y="2505075"/>
+            <a:ext cx="5183188" cy="3684588"/>
+          </a:xfrm>
+        </p:spPr>
+        <p:txBody>
+          <a:bodyPr/>
+          <a:lstStyle/>
+          <a:p>
+            <a:pPr lvl="0"/>
+            <a:r>
+              <a:rPr lang="en-US"/>
+              <a:t>Click to edit Master text styles</a:t>
+            </a:r>
+          </a:p>
+          <a:p>
+            <a:pPr lvl="1"/>
+            <a:r>
+              <a:rPr lang="en-US"/>
+              <a:t>Second level</a:t>
+            </a:r>
+          </a:p>
+          <a:p>
+            <a:pPr lvl="2"/>
+            <a:r>
+              <a:rPr lang="en-US"/>
+              <a:t>Third level</a:t>
+            </a:r>
+          </a:p>
+          <a:p>
+            <a:pPr lvl="3"/>
+            <a:r>
+              <a:rPr lang="en-US"/>
+              <a:t>Fourth level</a:t>
+            </a:r>
+          </a:p>
+          <a:p>
+            <a:pPr lvl="4"/>
+            <a:r>
+              <a:rPr lang="en-US"/>
+              <a:t>Fifth level</a:t>
+            </a:r>
+          </a:p>
+        </p:txBody>
+      </p:sp>
+      <p:sp>
+        <p:nvSpPr>
+          <p:cNvPr id="7" name="Date Placeholder 6">
+            <a:extLst>
+              <a:ext uri="{FF2B5EF4-FFF2-40B4-BE49-F238E27FC236}">
+                <a16:creationId xmlns:a16="http://schemas.microsoft.com/office/drawing/2014/main" id="{A9ED9BEE-D3BA-49C3-8C5A-1409539F1F13}"/>
+              </a:ext>
+            </a:extLst>
+          </p:cNvPr>
+          <p:cNvSpPr>
+            <a:spLocks noGrp="1"/>
+          </p:cNvSpPr>
+          <p:nvPr>
+            <p:ph type="dt" sz="half" idx="10"/>
+          </p:nvPr>
+        </p:nvSpPr>
+        <p:spPr/>
+        <p:txBody>
+          <a:bodyPr/>
+          <a:lstStyle/>
+          <a:p>
+            <a:fld id="{B55CAEFD-F031-424F-9422-B2C0B702207F}" type="datetimeFigureOut">
               <a:rPr lang="en-US" smtClean="0"/>
-              <a:t>Click to edit Master text styles</a:t>
-            </a:r>
-          </a:p>
-        </p:txBody>
-      </p:sp>
-      <p:sp>
-        <p:nvSpPr>
-          <p:cNvPr id="6" name="Content Placeholder 5"/>
-          <p:cNvSpPr>
-            <a:spLocks noGrp="1"/>
-          </p:cNvSpPr>
-          <p:nvPr>
-            <p:ph sz="quarter" idx="4"/>
-          </p:nvPr>
-        </p:nvSpPr>
-        <p:spPr>
-          <a:xfrm>
-            <a:off x="4645025" y="2174875"/>
-            <a:ext cx="4041775" cy="3951288"/>
-          </a:xfrm>
-        </p:spPr>
-        <p:txBody>
-          <a:bodyPr/>
-          <a:lstStyle>
-            <a:lvl1pPr>
-              <a:defRPr sz="2400"/>
-            </a:lvl1pPr>
-            <a:lvl2pPr>
-              <a:defRPr sz="2000"/>
-            </a:lvl2pPr>
-            <a:lvl3pPr>
-              <a:defRPr sz="1800"/>
-            </a:lvl3pPr>
-            <a:lvl4pPr>
-              <a:defRPr sz="1600"/>
-            </a:lvl4pPr>
-            <a:lvl5pPr>
-              <a:defRPr sz="1600"/>
-            </a:lvl5pPr>
-            <a:lvl6pPr>
-              <a:defRPr sz="1600"/>
-            </a:lvl6pPr>
-            <a:lvl7pPr>
-              <a:defRPr sz="1600"/>
-            </a:lvl7pPr>
-            <a:lvl8pPr>
-              <a:defRPr sz="1600"/>
-            </a:lvl8pPr>
-            <a:lvl9pPr>
-              <a:defRPr sz="1600"/>
-            </a:lvl9pPr>
-          </a:lstStyle>
-          <a:p>
-            <a:pPr lvl="0"/>
-            <a:r>
-              <a:rPr lang="en-US" smtClean="0"/>
-              <a:t>Click to edit Master text styles</a:t>
-            </a:r>
-          </a:p>
-          <a:p>
-            <a:pPr lvl="1"/>
-            <a:r>
-              <a:rPr lang="en-US" smtClean="0"/>
-              <a:t>Second level</a:t>
-            </a:r>
-          </a:p>
-          <a:p>
-            <a:pPr lvl="2"/>
-            <a:r>
-              <a:rPr lang="en-US" smtClean="0"/>
-              <a:t>Third level</a:t>
-            </a:r>
-          </a:p>
-          <a:p>
-            <a:pPr lvl="3"/>
-            <a:r>
-              <a:rPr lang="en-US" smtClean="0"/>
-              <a:t>Fourth level</a:t>
-            </a:r>
-          </a:p>
-          <a:p>
-            <a:pPr lvl="4"/>
-            <a:r>
-              <a:rPr lang="en-US" smtClean="0"/>
-              <a:t>Fifth level</a:t>
-            </a:r>
-            <a:endParaRPr lang="en-US"/>
-          </a:p>
-        </p:txBody>
-      </p:sp>
-      <p:sp>
-        <p:nvSpPr>
-          <p:cNvPr id="7" name="Date Placeholder 6"/>
-          <p:cNvSpPr>
-            <a:spLocks noGrp="1"/>
-          </p:cNvSpPr>
-          <p:nvPr>
-            <p:ph type="dt" sz="half" idx="10"/>
-          </p:nvPr>
-        </p:nvSpPr>
-        <p:spPr/>
-        <p:txBody>
-          <a:bodyPr/>
-          <a:lstStyle/>
-          <a:p>
-            <a:fld id="{5BCAD085-E8A6-8845-BD4E-CB4CCA059FC4}" type="datetimeFigureOut">
-              <a:rPr lang="en-US" smtClean="0"/>
-              <a:t>1/27/13</a:t>
+              <a:t>6/25/2021</a:t>
             </a:fld>
             <a:endParaRPr lang="en-US"/>
           </a:p>
@@ -1772,7 +1834,13 @@
       </p:sp>
       <p:sp>
         <p:nvSpPr>
-          <p:cNvPr id="8" name="Footer Placeholder 7"/>
+          <p:cNvPr id="8" name="Footer Placeholder 7">
+            <a:extLst>
+              <a:ext uri="{FF2B5EF4-FFF2-40B4-BE49-F238E27FC236}">
+                <a16:creationId xmlns:a16="http://schemas.microsoft.com/office/drawing/2014/main" id="{93AB25B3-9984-4FC4-BEF5-87FFBF08F8A2}"/>
+              </a:ext>
+            </a:extLst>
+          </p:cNvPr>
           <p:cNvSpPr>
             <a:spLocks noGrp="1"/>
           </p:cNvSpPr>
@@ -1791,7 +1859,13 @@
       </p:sp>
       <p:sp>
         <p:nvSpPr>
-          <p:cNvPr id="9" name="Slide Number Placeholder 8"/>
+          <p:cNvPr id="9" name="Slide Number Placeholder 8">
+            <a:extLst>
+              <a:ext uri="{FF2B5EF4-FFF2-40B4-BE49-F238E27FC236}">
+                <a16:creationId xmlns:a16="http://schemas.microsoft.com/office/drawing/2014/main" id="{CE14082F-EAB5-40C2-89F1-30876C41D82E}"/>
+              </a:ext>
+            </a:extLst>
+          </p:cNvPr>
           <p:cNvSpPr>
             <a:spLocks noGrp="1"/>
           </p:cNvSpPr>
@@ -1804,7 +1878,7 @@
           <a:bodyPr/>
           <a:lstStyle/>
           <a:p>
-            <a:fld id="{C1FF6DA9-008F-8B48-92A6-B652298478BF}" type="slidenum">
+            <a:fld id="{8951AC35-B36C-4D75-A6AF-F09D66D83A88}" type="slidenum">
               <a:rPr lang="en-US" smtClean="0"/>
               <a:t>‹#›</a:t>
             </a:fld>
@@ -1815,7 +1889,7 @@
     </p:spTree>
     <p:extLst>
       <p:ext uri="{BB962C8B-B14F-4D97-AF65-F5344CB8AC3E}">
-        <p14:creationId xmlns:p14="http://schemas.microsoft.com/office/powerpoint/2010/main" val="990158736"/>
+        <p14:creationId xmlns:p14="http://schemas.microsoft.com/office/powerpoint/2010/main" val="73632665"/>
       </p:ext>
     </p:extLst>
   </p:cSld>
@@ -1844,7 +1918,13 @@
       </p:grpSpPr>
       <p:sp>
         <p:nvSpPr>
-          <p:cNvPr id="2" name="Title 1"/>
+          <p:cNvPr id="2" name="Title 1">
+            <a:extLst>
+              <a:ext uri="{FF2B5EF4-FFF2-40B4-BE49-F238E27FC236}">
+                <a16:creationId xmlns:a16="http://schemas.microsoft.com/office/drawing/2014/main" id="{7EA7B187-713A-4ADB-910E-1CCD12BF0141}"/>
+              </a:ext>
+            </a:extLst>
+          </p:cNvPr>
           <p:cNvSpPr>
             <a:spLocks noGrp="1"/>
           </p:cNvSpPr>
@@ -1858,31 +1938,36 @@
           <a:lstStyle/>
           <a:p>
             <a:r>
+              <a:rPr lang="en-US"/>
+              <a:t>Click to edit Master title style</a:t>
+            </a:r>
+          </a:p>
+        </p:txBody>
+      </p:sp>
+      <p:sp>
+        <p:nvSpPr>
+          <p:cNvPr id="3" name="Date Placeholder 2">
+            <a:extLst>
+              <a:ext uri="{FF2B5EF4-FFF2-40B4-BE49-F238E27FC236}">
+                <a16:creationId xmlns:a16="http://schemas.microsoft.com/office/drawing/2014/main" id="{BCA018E4-6004-4396-8CE2-27883484EEE1}"/>
+              </a:ext>
+            </a:extLst>
+          </p:cNvPr>
+          <p:cNvSpPr>
+            <a:spLocks noGrp="1"/>
+          </p:cNvSpPr>
+          <p:nvPr>
+            <p:ph type="dt" sz="half" idx="10"/>
+          </p:nvPr>
+        </p:nvSpPr>
+        <p:spPr/>
+        <p:txBody>
+          <a:bodyPr/>
+          <a:lstStyle/>
+          <a:p>
+            <a:fld id="{B55CAEFD-F031-424F-9422-B2C0B702207F}" type="datetimeFigureOut">
               <a:rPr lang="en-US" smtClean="0"/>
-              <a:t>Click to edit Master title style</a:t>
-            </a:r>
-            <a:endParaRPr lang="en-US"/>
-          </a:p>
-        </p:txBody>
-      </p:sp>
-      <p:sp>
-        <p:nvSpPr>
-          <p:cNvPr id="3" name="Date Placeholder 2"/>
-          <p:cNvSpPr>
-            <a:spLocks noGrp="1"/>
-          </p:cNvSpPr>
-          <p:nvPr>
-            <p:ph type="dt" sz="half" idx="10"/>
-          </p:nvPr>
-        </p:nvSpPr>
-        <p:spPr/>
-        <p:txBody>
-          <a:bodyPr/>
-          <a:lstStyle/>
-          <a:p>
-            <a:fld id="{5BCAD085-E8A6-8845-BD4E-CB4CCA059FC4}" type="datetimeFigureOut">
-              <a:rPr lang="en-US" smtClean="0"/>
-              <a:t>1/27/13</a:t>
+              <a:t>6/25/2021</a:t>
             </a:fld>
             <a:endParaRPr lang="en-US"/>
           </a:p>
@@ -1890,7 +1975,13 @@
       </p:sp>
       <p:sp>
         <p:nvSpPr>
-          <p:cNvPr id="4" name="Footer Placeholder 3"/>
+          <p:cNvPr id="4" name="Footer Placeholder 3">
+            <a:extLst>
+              <a:ext uri="{FF2B5EF4-FFF2-40B4-BE49-F238E27FC236}">
+                <a16:creationId xmlns:a16="http://schemas.microsoft.com/office/drawing/2014/main" id="{4AD719A6-9F98-4C23-9E27-7EEE2DC40408}"/>
+              </a:ext>
+            </a:extLst>
+          </p:cNvPr>
           <p:cNvSpPr>
             <a:spLocks noGrp="1"/>
           </p:cNvSpPr>
@@ -1909,7 +2000,13 @@
       </p:sp>
       <p:sp>
         <p:nvSpPr>
-          <p:cNvPr id="5" name="Slide Number Placeholder 4"/>
+          <p:cNvPr id="5" name="Slide Number Placeholder 4">
+            <a:extLst>
+              <a:ext uri="{FF2B5EF4-FFF2-40B4-BE49-F238E27FC236}">
+                <a16:creationId xmlns:a16="http://schemas.microsoft.com/office/drawing/2014/main" id="{C40D58A9-4DFB-4AB3-B18F-B4043DE699FE}"/>
+              </a:ext>
+            </a:extLst>
+          </p:cNvPr>
           <p:cNvSpPr>
             <a:spLocks noGrp="1"/>
           </p:cNvSpPr>
@@ -1922,7 +2019,7 @@
           <a:bodyPr/>
           <a:lstStyle/>
           <a:p>
-            <a:fld id="{C1FF6DA9-008F-8B48-92A6-B652298478BF}" type="slidenum">
+            <a:fld id="{8951AC35-B36C-4D75-A6AF-F09D66D83A88}" type="slidenum">
               <a:rPr lang="en-US" smtClean="0"/>
               <a:t>‹#›</a:t>
             </a:fld>
@@ -1933,7 +2030,7 @@
     </p:spTree>
     <p:extLst>
       <p:ext uri="{BB962C8B-B14F-4D97-AF65-F5344CB8AC3E}">
-        <p14:creationId xmlns:p14="http://schemas.microsoft.com/office/powerpoint/2010/main" val="727027711"/>
+        <p14:creationId xmlns:p14="http://schemas.microsoft.com/office/powerpoint/2010/main" val="2677334151"/>
       </p:ext>
     </p:extLst>
   </p:cSld>
@@ -1962,7 +2059,13 @@
       </p:grpSpPr>
       <p:sp>
         <p:nvSpPr>
-          <p:cNvPr id="2" name="Date Placeholder 1"/>
+          <p:cNvPr id="2" name="Date Placeholder 1">
+            <a:extLst>
+              <a:ext uri="{FF2B5EF4-FFF2-40B4-BE49-F238E27FC236}">
+                <a16:creationId xmlns:a16="http://schemas.microsoft.com/office/drawing/2014/main" id="{3F0788B1-8F53-4EE6-9FF1-4888CAEF49CC}"/>
+              </a:ext>
+            </a:extLst>
+          </p:cNvPr>
           <p:cNvSpPr>
             <a:spLocks noGrp="1"/>
           </p:cNvSpPr>
@@ -1975,9 +2078,9 @@
           <a:bodyPr/>
           <a:lstStyle/>
           <a:p>
-            <a:fld id="{5BCAD085-E8A6-8845-BD4E-CB4CCA059FC4}" type="datetimeFigureOut">
+            <a:fld id="{B55CAEFD-F031-424F-9422-B2C0B702207F}" type="datetimeFigureOut">
               <a:rPr lang="en-US" smtClean="0"/>
-              <a:t>1/27/13</a:t>
+              <a:t>6/25/2021</a:t>
             </a:fld>
             <a:endParaRPr lang="en-US"/>
           </a:p>
@@ -1985,7 +2088,13 @@
       </p:sp>
       <p:sp>
         <p:nvSpPr>
-          <p:cNvPr id="3" name="Footer Placeholder 2"/>
+          <p:cNvPr id="3" name="Footer Placeholder 2">
+            <a:extLst>
+              <a:ext uri="{FF2B5EF4-FFF2-40B4-BE49-F238E27FC236}">
+                <a16:creationId xmlns:a16="http://schemas.microsoft.com/office/drawing/2014/main" id="{897249D6-7861-40CD-B6EB-16417797E443}"/>
+              </a:ext>
+            </a:extLst>
+          </p:cNvPr>
           <p:cNvSpPr>
             <a:spLocks noGrp="1"/>
           </p:cNvSpPr>
@@ -2004,7 +2113,13 @@
       </p:sp>
       <p:sp>
         <p:nvSpPr>
-          <p:cNvPr id="4" name="Slide Number Placeholder 3"/>
+          <p:cNvPr id="4" name="Slide Number Placeholder 3">
+            <a:extLst>
+              <a:ext uri="{FF2B5EF4-FFF2-40B4-BE49-F238E27FC236}">
+                <a16:creationId xmlns:a16="http://schemas.microsoft.com/office/drawing/2014/main" id="{5780D212-83FE-4FCB-B6C8-FE40E8CB377C}"/>
+              </a:ext>
+            </a:extLst>
+          </p:cNvPr>
           <p:cNvSpPr>
             <a:spLocks noGrp="1"/>
           </p:cNvSpPr>
@@ -2017,7 +2132,7 @@
           <a:bodyPr/>
           <a:lstStyle/>
           <a:p>
-            <a:fld id="{C1FF6DA9-008F-8B48-92A6-B652298478BF}" type="slidenum">
+            <a:fld id="{8951AC35-B36C-4D75-A6AF-F09D66D83A88}" type="slidenum">
               <a:rPr lang="en-US" smtClean="0"/>
               <a:t>‹#›</a:t>
             </a:fld>
@@ -2028,7 +2143,7 @@
     </p:spTree>
     <p:extLst>
       <p:ext uri="{BB962C8B-B14F-4D97-AF65-F5344CB8AC3E}">
-        <p14:creationId xmlns:p14="http://schemas.microsoft.com/office/powerpoint/2010/main" val="1212999818"/>
+        <p14:creationId xmlns:p14="http://schemas.microsoft.com/office/powerpoint/2010/main" val="929847265"/>
       </p:ext>
     </p:extLst>
   </p:cSld>
@@ -2057,7 +2172,13 @@
       </p:grpSpPr>
       <p:sp>
         <p:nvSpPr>
-          <p:cNvPr id="2" name="Title 1"/>
+          <p:cNvPr id="2" name="Title 1">
+            <a:extLst>
+              <a:ext uri="{FF2B5EF4-FFF2-40B4-BE49-F238E27FC236}">
+                <a16:creationId xmlns:a16="http://schemas.microsoft.com/office/drawing/2014/main" id="{4C444512-140E-4173-AAF9-3D8223E29B28}"/>
+              </a:ext>
+            </a:extLst>
+          </p:cNvPr>
           <p:cNvSpPr>
             <a:spLocks noGrp="1"/>
           </p:cNvSpPr>
@@ -2067,29 +2188,34 @@
         </p:nvSpPr>
         <p:spPr>
           <a:xfrm>
-            <a:off x="457200" y="273050"/>
-            <a:ext cx="3008313" cy="1162050"/>
+            <a:off x="839788" y="457200"/>
+            <a:ext cx="3932237" cy="1600200"/>
           </a:xfrm>
         </p:spPr>
         <p:txBody>
           <a:bodyPr anchor="b"/>
           <a:lstStyle>
-            <a:lvl1pPr algn="l">
-              <a:defRPr sz="2000" b="1"/>
+            <a:lvl1pPr>
+              <a:defRPr sz="3200"/>
             </a:lvl1pPr>
           </a:lstStyle>
           <a:p>
             <a:r>
-              <a:rPr lang="en-US" smtClean="0"/>
+              <a:rPr lang="en-US"/>
               <a:t>Click to edit Master title style</a:t>
             </a:r>
-            <a:endParaRPr lang="en-US"/>
-          </a:p>
-        </p:txBody>
-      </p:sp>
-      <p:sp>
-        <p:nvSpPr>
-          <p:cNvPr id="3" name="Content Placeholder 2"/>
+          </a:p>
+        </p:txBody>
+      </p:sp>
+      <p:sp>
+        <p:nvSpPr>
+          <p:cNvPr id="3" name="Content Placeholder 2">
+            <a:extLst>
+              <a:ext uri="{FF2B5EF4-FFF2-40B4-BE49-F238E27FC236}">
+                <a16:creationId xmlns:a16="http://schemas.microsoft.com/office/drawing/2014/main" id="{9D5D3F37-54C3-41D9-AEB3-7CF9F0A90012}"/>
+              </a:ext>
+            </a:extLst>
+          </p:cNvPr>
           <p:cNvSpPr>
             <a:spLocks noGrp="1"/>
           </p:cNvSpPr>
@@ -2099,8 +2225,8 @@
         </p:nvSpPr>
         <p:spPr>
           <a:xfrm>
-            <a:off x="3575050" y="273050"/>
-            <a:ext cx="5111750" cy="5853113"/>
+            <a:off x="5183188" y="987425"/>
+            <a:ext cx="6172200" cy="4873625"/>
           </a:xfrm>
         </p:spPr>
         <p:txBody>
@@ -2137,44 +2263,49 @@
           <a:p>
             <a:pPr lvl="0"/>
             <a:r>
-              <a:rPr lang="en-US" smtClean="0"/>
+              <a:rPr lang="en-US"/>
               <a:t>Click to edit Master text styles</a:t>
             </a:r>
           </a:p>
           <a:p>
             <a:pPr lvl="1"/>
             <a:r>
-              <a:rPr lang="en-US" smtClean="0"/>
+              <a:rPr lang="en-US"/>
               <a:t>Second level</a:t>
             </a:r>
           </a:p>
           <a:p>
             <a:pPr lvl="2"/>
             <a:r>
-              <a:rPr lang="en-US" smtClean="0"/>
+              <a:rPr lang="en-US"/>
               <a:t>Third level</a:t>
             </a:r>
           </a:p>
           <a:p>
             <a:pPr lvl="3"/>
             <a:r>
-              <a:rPr lang="en-US" smtClean="0"/>
+              <a:rPr lang="en-US"/>
               <a:t>Fourth level</a:t>
             </a:r>
           </a:p>
           <a:p>
             <a:pPr lvl="4"/>
             <a:r>
-              <a:rPr lang="en-US" smtClean="0"/>
+              <a:rPr lang="en-US"/>
               <a:t>Fifth level</a:t>
             </a:r>
-            <a:endParaRPr lang="en-US"/>
-          </a:p>
-        </p:txBody>
-      </p:sp>
-      <p:sp>
-        <p:nvSpPr>
-          <p:cNvPr id="4" name="Text Placeholder 3"/>
+          </a:p>
+        </p:txBody>
+      </p:sp>
+      <p:sp>
+        <p:nvSpPr>
+          <p:cNvPr id="4" name="Text Placeholder 3">
+            <a:extLst>
+              <a:ext uri="{FF2B5EF4-FFF2-40B4-BE49-F238E27FC236}">
+                <a16:creationId xmlns:a16="http://schemas.microsoft.com/office/drawing/2014/main" id="{B376E7BA-3178-4DBE-A826-0950A444A2B3}"/>
+              </a:ext>
+            </a:extLst>
+          </p:cNvPr>
           <p:cNvSpPr>
             <a:spLocks noGrp="1"/>
           </p:cNvSpPr>
@@ -2184,8 +2315,8 @@
         </p:nvSpPr>
         <p:spPr>
           <a:xfrm>
-            <a:off x="457200" y="1435100"/>
-            <a:ext cx="3008313" cy="4691063"/>
+            <a:off x="839788" y="2057400"/>
+            <a:ext cx="3932237" cy="3811588"/>
           </a:xfrm>
         </p:spPr>
         <p:txBody>
@@ -2193,68 +2324,74 @@
           <a:lstStyle>
             <a:lvl1pPr marL="0" indent="0">
               <a:buNone/>
-              <a:defRPr sz="1400"/>
+              <a:defRPr sz="1600"/>
             </a:lvl1pPr>
             <a:lvl2pPr marL="457200" indent="0">
               <a:buNone/>
-              <a:defRPr sz="1200"/>
+              <a:defRPr sz="1400"/>
             </a:lvl2pPr>
             <a:lvl3pPr marL="914400" indent="0">
               <a:buNone/>
-              <a:defRPr sz="1000"/>
+              <a:defRPr sz="1200"/>
             </a:lvl3pPr>
             <a:lvl4pPr marL="1371600" indent="0">
               <a:buNone/>
-              <a:defRPr sz="900"/>
+              <a:defRPr sz="1000"/>
             </a:lvl4pPr>
             <a:lvl5pPr marL="1828800" indent="0">
               <a:buNone/>
-              <a:defRPr sz="900"/>
+              <a:defRPr sz="1000"/>
             </a:lvl5pPr>
             <a:lvl6pPr marL="2286000" indent="0">
               <a:buNone/>
-              <a:defRPr sz="900"/>
+              <a:defRPr sz="1000"/>
             </a:lvl6pPr>
             <a:lvl7pPr marL="2743200" indent="0">
               <a:buNone/>
-              <a:defRPr sz="900"/>
+              <a:defRPr sz="1000"/>
             </a:lvl7pPr>
             <a:lvl8pPr marL="3200400" indent="0">
               <a:buNone/>
-              <a:defRPr sz="900"/>
+              <a:defRPr sz="1000"/>
             </a:lvl8pPr>
             <a:lvl9pPr marL="3657600" indent="0">
               <a:buNone/>
-              <a:defRPr sz="900"/>
+              <a:defRPr sz="1000"/>
             </a:lvl9pPr>
           </a:lstStyle>
           <a:p>
             <a:pPr lvl="0"/>
             <a:r>
+              <a:rPr lang="en-US"/>
+              <a:t>Click to edit Master text styles</a:t>
+            </a:r>
+          </a:p>
+        </p:txBody>
+      </p:sp>
+      <p:sp>
+        <p:nvSpPr>
+          <p:cNvPr id="5" name="Date Placeholder 4">
+            <a:extLst>
+              <a:ext uri="{FF2B5EF4-FFF2-40B4-BE49-F238E27FC236}">
+                <a16:creationId xmlns:a16="http://schemas.microsoft.com/office/drawing/2014/main" id="{051C21CF-BA78-4DA3-BCC3-FC00A05182C9}"/>
+              </a:ext>
+            </a:extLst>
+          </p:cNvPr>
+          <p:cNvSpPr>
+            <a:spLocks noGrp="1"/>
+          </p:cNvSpPr>
+          <p:nvPr>
+            <p:ph type="dt" sz="half" idx="10"/>
+          </p:nvPr>
+        </p:nvSpPr>
+        <p:spPr/>
+        <p:txBody>
+          <a:bodyPr/>
+          <a:lstStyle/>
+          <a:p>
+            <a:fld id="{B55CAEFD-F031-424F-9422-B2C0B702207F}" type="datetimeFigureOut">
               <a:rPr lang="en-US" smtClean="0"/>
-              <a:t>Click to edit Master text styles</a:t>
-            </a:r>
-          </a:p>
-        </p:txBody>
-      </p:sp>
-      <p:sp>
-        <p:nvSpPr>
-          <p:cNvPr id="5" name="Date Placeholder 4"/>
-          <p:cNvSpPr>
-            <a:spLocks noGrp="1"/>
-          </p:cNvSpPr>
-          <p:nvPr>
-            <p:ph type="dt" sz="half" idx="10"/>
-          </p:nvPr>
-        </p:nvSpPr>
-        <p:spPr/>
-        <p:txBody>
-          <a:bodyPr/>
-          <a:lstStyle/>
-          <a:p>
-            <a:fld id="{5BCAD085-E8A6-8845-BD4E-CB4CCA059FC4}" type="datetimeFigureOut">
-              <a:rPr lang="en-US" smtClean="0"/>
-              <a:t>1/27/13</a:t>
+              <a:t>6/25/2021</a:t>
             </a:fld>
             <a:endParaRPr lang="en-US"/>
           </a:p>
@@ -2262,7 +2399,13 @@
       </p:sp>
       <p:sp>
         <p:nvSpPr>
-          <p:cNvPr id="6" name="Footer Placeholder 5"/>
+          <p:cNvPr id="6" name="Footer Placeholder 5">
+            <a:extLst>
+              <a:ext uri="{FF2B5EF4-FFF2-40B4-BE49-F238E27FC236}">
+                <a16:creationId xmlns:a16="http://schemas.microsoft.com/office/drawing/2014/main" id="{69AB6C47-009A-41E4-959E-F08F2AE42081}"/>
+              </a:ext>
+            </a:extLst>
+          </p:cNvPr>
           <p:cNvSpPr>
             <a:spLocks noGrp="1"/>
           </p:cNvSpPr>
@@ -2281,7 +2424,13 @@
       </p:sp>
       <p:sp>
         <p:nvSpPr>
-          <p:cNvPr id="7" name="Slide Number Placeholder 6"/>
+          <p:cNvPr id="7" name="Slide Number Placeholder 6">
+            <a:extLst>
+              <a:ext uri="{FF2B5EF4-FFF2-40B4-BE49-F238E27FC236}">
+                <a16:creationId xmlns:a16="http://schemas.microsoft.com/office/drawing/2014/main" id="{B7EA73BB-8166-47ED-AEEA-4B1E543ADAB8}"/>
+              </a:ext>
+            </a:extLst>
+          </p:cNvPr>
           <p:cNvSpPr>
             <a:spLocks noGrp="1"/>
           </p:cNvSpPr>
@@ -2294,7 +2443,7 @@
           <a:bodyPr/>
           <a:lstStyle/>
           <a:p>
-            <a:fld id="{C1FF6DA9-008F-8B48-92A6-B652298478BF}" type="slidenum">
+            <a:fld id="{8951AC35-B36C-4D75-A6AF-F09D66D83A88}" type="slidenum">
               <a:rPr lang="en-US" smtClean="0"/>
               <a:t>‹#›</a:t>
             </a:fld>
@@ -2305,7 +2454,7 @@
     </p:spTree>
     <p:extLst>
       <p:ext uri="{BB962C8B-B14F-4D97-AF65-F5344CB8AC3E}">
-        <p14:creationId xmlns:p14="http://schemas.microsoft.com/office/powerpoint/2010/main" val="1840726560"/>
+        <p14:creationId xmlns:p14="http://schemas.microsoft.com/office/powerpoint/2010/main" val="2437735635"/>
       </p:ext>
     </p:extLst>
   </p:cSld>
@@ -2334,7 +2483,13 @@
       </p:grpSpPr>
       <p:sp>
         <p:nvSpPr>
-          <p:cNvPr id="2" name="Title 1"/>
+          <p:cNvPr id="2" name="Title 1">
+            <a:extLst>
+              <a:ext uri="{FF2B5EF4-FFF2-40B4-BE49-F238E27FC236}">
+                <a16:creationId xmlns:a16="http://schemas.microsoft.com/office/drawing/2014/main" id="{40517B15-0B81-45BF-9CD5-B730D4471EA0}"/>
+              </a:ext>
+            </a:extLst>
+          </p:cNvPr>
           <p:cNvSpPr>
             <a:spLocks noGrp="1"/>
           </p:cNvSpPr>
@@ -2344,29 +2499,34 @@
         </p:nvSpPr>
         <p:spPr>
           <a:xfrm>
-            <a:off x="1792288" y="4800600"/>
-            <a:ext cx="5486400" cy="566738"/>
+            <a:off x="839788" y="457200"/>
+            <a:ext cx="3932237" cy="1600200"/>
           </a:xfrm>
         </p:spPr>
         <p:txBody>
           <a:bodyPr anchor="b"/>
           <a:lstStyle>
-            <a:lvl1pPr algn="l">
-              <a:defRPr sz="2000" b="1"/>
+            <a:lvl1pPr>
+              <a:defRPr sz="3200"/>
             </a:lvl1pPr>
           </a:lstStyle>
           <a:p>
             <a:r>
-              <a:rPr lang="en-US" smtClean="0"/>
+              <a:rPr lang="en-US"/>
               <a:t>Click to edit Master title style</a:t>
             </a:r>
-            <a:endParaRPr lang="en-US"/>
-          </a:p>
-        </p:txBody>
-      </p:sp>
-      <p:sp>
-        <p:nvSpPr>
-          <p:cNvPr id="3" name="Picture Placeholder 2"/>
+          </a:p>
+        </p:txBody>
+      </p:sp>
+      <p:sp>
+        <p:nvSpPr>
+          <p:cNvPr id="3" name="Picture Placeholder 2">
+            <a:extLst>
+              <a:ext uri="{FF2B5EF4-FFF2-40B4-BE49-F238E27FC236}">
+                <a16:creationId xmlns:a16="http://schemas.microsoft.com/office/drawing/2014/main" id="{ECFAA211-938F-4EBA-BF38-D0448959EC85}"/>
+              </a:ext>
+            </a:extLst>
+          </p:cNvPr>
           <p:cNvSpPr>
             <a:spLocks noGrp="1"/>
           </p:cNvSpPr>
@@ -2376,8 +2536,8 @@
         </p:nvSpPr>
         <p:spPr>
           <a:xfrm>
-            <a:off x="1792288" y="612775"/>
-            <a:ext cx="5486400" cy="4114800"/>
+            <a:off x="5183188" y="987425"/>
+            <a:ext cx="6172200" cy="4873625"/>
           </a:xfrm>
         </p:spPr>
         <p:txBody>
@@ -2427,7 +2587,13 @@
       </p:sp>
       <p:sp>
         <p:nvSpPr>
-          <p:cNvPr id="4" name="Text Placeholder 3"/>
+          <p:cNvPr id="4" name="Text Placeholder 3">
+            <a:extLst>
+              <a:ext uri="{FF2B5EF4-FFF2-40B4-BE49-F238E27FC236}">
+                <a16:creationId xmlns:a16="http://schemas.microsoft.com/office/drawing/2014/main" id="{4026B5E5-AD61-4F4B-AAA2-17DB0A3251B9}"/>
+              </a:ext>
+            </a:extLst>
+          </p:cNvPr>
           <p:cNvSpPr>
             <a:spLocks noGrp="1"/>
           </p:cNvSpPr>
@@ -2437,8 +2603,8 @@
         </p:nvSpPr>
         <p:spPr>
           <a:xfrm>
-            <a:off x="1792288" y="5367338"/>
-            <a:ext cx="5486400" cy="804862"/>
+            <a:off x="839788" y="2057400"/>
+            <a:ext cx="3932237" cy="3811588"/>
           </a:xfrm>
         </p:spPr>
         <p:txBody>
@@ -2446,68 +2612,74 @@
           <a:lstStyle>
             <a:lvl1pPr marL="0" indent="0">
               <a:buNone/>
-              <a:defRPr sz="1400"/>
+              <a:defRPr sz="1600"/>
             </a:lvl1pPr>
             <a:lvl2pPr marL="457200" indent="0">
               <a:buNone/>
-              <a:defRPr sz="1200"/>
+              <a:defRPr sz="1400"/>
             </a:lvl2pPr>
             <a:lvl3pPr marL="914400" indent="0">
               <a:buNone/>
-              <a:defRPr sz="1000"/>
+              <a:defRPr sz="1200"/>
             </a:lvl3pPr>
             <a:lvl4pPr marL="1371600" indent="0">
               <a:buNone/>
-              <a:defRPr sz="900"/>
+              <a:defRPr sz="1000"/>
             </a:lvl4pPr>
             <a:lvl5pPr marL="1828800" indent="0">
               <a:buNone/>
-              <a:defRPr sz="900"/>
+              <a:defRPr sz="1000"/>
             </a:lvl5pPr>
             <a:lvl6pPr marL="2286000" indent="0">
               <a:buNone/>
-              <a:defRPr sz="900"/>
+              <a:defRPr sz="1000"/>
             </a:lvl6pPr>
             <a:lvl7pPr marL="2743200" indent="0">
               <a:buNone/>
-              <a:defRPr sz="900"/>
+              <a:defRPr sz="1000"/>
             </a:lvl7pPr>
             <a:lvl8pPr marL="3200400" indent="0">
               <a:buNone/>
-              <a:defRPr sz="900"/>
+              <a:defRPr sz="1000"/>
             </a:lvl8pPr>
             <a:lvl9pPr marL="3657600" indent="0">
               <a:buNone/>
-              <a:defRPr sz="900"/>
+              <a:defRPr sz="1000"/>
             </a:lvl9pPr>
           </a:lstStyle>
           <a:p>
             <a:pPr lvl="0"/>
             <a:r>
+              <a:rPr lang="en-US"/>
+              <a:t>Click to edit Master text styles</a:t>
+            </a:r>
+          </a:p>
+        </p:txBody>
+      </p:sp>
+      <p:sp>
+        <p:nvSpPr>
+          <p:cNvPr id="5" name="Date Placeholder 4">
+            <a:extLst>
+              <a:ext uri="{FF2B5EF4-FFF2-40B4-BE49-F238E27FC236}">
+                <a16:creationId xmlns:a16="http://schemas.microsoft.com/office/drawing/2014/main" id="{AE830ACE-1A71-4AE1-9D4B-024D35768006}"/>
+              </a:ext>
+            </a:extLst>
+          </p:cNvPr>
+          <p:cNvSpPr>
+            <a:spLocks noGrp="1"/>
+          </p:cNvSpPr>
+          <p:nvPr>
+            <p:ph type="dt" sz="half" idx="10"/>
+          </p:nvPr>
+        </p:nvSpPr>
+        <p:spPr/>
+        <p:txBody>
+          <a:bodyPr/>
+          <a:lstStyle/>
+          <a:p>
+            <a:fld id="{B55CAEFD-F031-424F-9422-B2C0B702207F}" type="datetimeFigureOut">
               <a:rPr lang="en-US" smtClean="0"/>
-              <a:t>Click to edit Master text styles</a:t>
-            </a:r>
-          </a:p>
-        </p:txBody>
-      </p:sp>
-      <p:sp>
-        <p:nvSpPr>
-          <p:cNvPr id="5" name="Date Placeholder 4"/>
-          <p:cNvSpPr>
-            <a:spLocks noGrp="1"/>
-          </p:cNvSpPr>
-          <p:nvPr>
-            <p:ph type="dt" sz="half" idx="10"/>
-          </p:nvPr>
-        </p:nvSpPr>
-        <p:spPr/>
-        <p:txBody>
-          <a:bodyPr/>
-          <a:lstStyle/>
-          <a:p>
-            <a:fld id="{5BCAD085-E8A6-8845-BD4E-CB4CCA059FC4}" type="datetimeFigureOut">
-              <a:rPr lang="en-US" smtClean="0"/>
-              <a:t>1/27/13</a:t>
+              <a:t>6/25/2021</a:t>
             </a:fld>
             <a:endParaRPr lang="en-US"/>
           </a:p>
@@ -2515,7 +2687,13 @@
       </p:sp>
       <p:sp>
         <p:nvSpPr>
-          <p:cNvPr id="6" name="Footer Placeholder 5"/>
+          <p:cNvPr id="6" name="Footer Placeholder 5">
+            <a:extLst>
+              <a:ext uri="{FF2B5EF4-FFF2-40B4-BE49-F238E27FC236}">
+                <a16:creationId xmlns:a16="http://schemas.microsoft.com/office/drawing/2014/main" id="{50E61A4D-53EE-4FA0-AC23-67F602DE9310}"/>
+              </a:ext>
+            </a:extLst>
+          </p:cNvPr>
           <p:cNvSpPr>
             <a:spLocks noGrp="1"/>
           </p:cNvSpPr>
@@ -2534,7 +2712,13 @@
       </p:sp>
       <p:sp>
         <p:nvSpPr>
-          <p:cNvPr id="7" name="Slide Number Placeholder 6"/>
+          <p:cNvPr id="7" name="Slide Number Placeholder 6">
+            <a:extLst>
+              <a:ext uri="{FF2B5EF4-FFF2-40B4-BE49-F238E27FC236}">
+                <a16:creationId xmlns:a16="http://schemas.microsoft.com/office/drawing/2014/main" id="{BE593DA0-D4DE-417E-BE03-1ABEC7BE2A20}"/>
+              </a:ext>
+            </a:extLst>
+          </p:cNvPr>
           <p:cNvSpPr>
             <a:spLocks noGrp="1"/>
           </p:cNvSpPr>
@@ -2547,7 +2731,7 @@
           <a:bodyPr/>
           <a:lstStyle/>
           <a:p>
-            <a:fld id="{C1FF6DA9-008F-8B48-92A6-B652298478BF}" type="slidenum">
+            <a:fld id="{8951AC35-B36C-4D75-A6AF-F09D66D83A88}" type="slidenum">
               <a:rPr lang="en-US" smtClean="0"/>
               <a:t>‹#›</a:t>
             </a:fld>
@@ -2558,7 +2742,7 @@
     </p:spTree>
     <p:extLst>
       <p:ext uri="{BB962C8B-B14F-4D97-AF65-F5344CB8AC3E}">
-        <p14:creationId xmlns:p14="http://schemas.microsoft.com/office/powerpoint/2010/main" val="3889236939"/>
+        <p14:creationId xmlns:p14="http://schemas.microsoft.com/office/powerpoint/2010/main" val="4135789504"/>
       </p:ext>
     </p:extLst>
   </p:cSld>
@@ -2592,7 +2776,13 @@
       </p:grpSpPr>
       <p:sp>
         <p:nvSpPr>
-          <p:cNvPr id="2" name="Title Placeholder 1"/>
+          <p:cNvPr id="2" name="Title Placeholder 1">
+            <a:extLst>
+              <a:ext uri="{FF2B5EF4-FFF2-40B4-BE49-F238E27FC236}">
+                <a16:creationId xmlns:a16="http://schemas.microsoft.com/office/drawing/2014/main" id="{67D823D7-6362-4E8D-8D8F-7942CF7C29F6}"/>
+              </a:ext>
+            </a:extLst>
+          </p:cNvPr>
           <p:cNvSpPr>
             <a:spLocks noGrp="1"/>
           </p:cNvSpPr>
@@ -2602,8 +2792,8 @@
         </p:nvSpPr>
         <p:spPr>
           <a:xfrm>
-            <a:off x="457200" y="274638"/>
-            <a:ext cx="8229600" cy="1143000"/>
+            <a:off x="838200" y="365125"/>
+            <a:ext cx="10515600" cy="1325563"/>
           </a:xfrm>
           <a:prstGeom prst="rect">
             <a:avLst/>
@@ -2616,16 +2806,21 @@
           <a:lstStyle/>
           <a:p>
             <a:r>
-              <a:rPr lang="en-US" smtClean="0"/>
+              <a:rPr lang="en-US"/>
               <a:t>Click to edit Master title style</a:t>
             </a:r>
-            <a:endParaRPr lang="en-US"/>
-          </a:p>
-        </p:txBody>
-      </p:sp>
-      <p:sp>
-        <p:nvSpPr>
-          <p:cNvPr id="3" name="Text Placeholder 2"/>
+          </a:p>
+        </p:txBody>
+      </p:sp>
+      <p:sp>
+        <p:nvSpPr>
+          <p:cNvPr id="3" name="Text Placeholder 2">
+            <a:extLst>
+              <a:ext uri="{FF2B5EF4-FFF2-40B4-BE49-F238E27FC236}">
+                <a16:creationId xmlns:a16="http://schemas.microsoft.com/office/drawing/2014/main" id="{DBE9752A-8D20-4E46-B14A-5CFC52F72473}"/>
+              </a:ext>
+            </a:extLst>
+          </p:cNvPr>
           <p:cNvSpPr>
             <a:spLocks noGrp="1"/>
           </p:cNvSpPr>
@@ -2635,8 +2830,8 @@
         </p:nvSpPr>
         <p:spPr>
           <a:xfrm>
-            <a:off x="457200" y="1600200"/>
-            <a:ext cx="8229600" cy="4525963"/>
+            <a:off x="838200" y="1825625"/>
+            <a:ext cx="10515600" cy="4351338"/>
           </a:xfrm>
           <a:prstGeom prst="rect">
             <a:avLst/>
@@ -2650,44 +2845,49 @@
           <a:p>
             <a:pPr lvl="0"/>
             <a:r>
-              <a:rPr lang="en-US" smtClean="0"/>
+              <a:rPr lang="en-US"/>
               <a:t>Click to edit Master text styles</a:t>
             </a:r>
           </a:p>
           <a:p>
             <a:pPr lvl="1"/>
             <a:r>
-              <a:rPr lang="en-US" smtClean="0"/>
+              <a:rPr lang="en-US"/>
               <a:t>Second level</a:t>
             </a:r>
           </a:p>
           <a:p>
             <a:pPr lvl="2"/>
             <a:r>
-              <a:rPr lang="en-US" smtClean="0"/>
+              <a:rPr lang="en-US"/>
               <a:t>Third level</a:t>
             </a:r>
           </a:p>
           <a:p>
             <a:pPr lvl="3"/>
             <a:r>
-              <a:rPr lang="en-US" smtClean="0"/>
+              <a:rPr lang="en-US"/>
               <a:t>Fourth level</a:t>
             </a:r>
           </a:p>
           <a:p>
             <a:pPr lvl="4"/>
             <a:r>
-              <a:rPr lang="en-US" smtClean="0"/>
+              <a:rPr lang="en-US"/>
               <a:t>Fifth level</a:t>
             </a:r>
-            <a:endParaRPr lang="en-US"/>
-          </a:p>
-        </p:txBody>
-      </p:sp>
-      <p:sp>
-        <p:nvSpPr>
-          <p:cNvPr id="4" name="Date Placeholder 3"/>
+          </a:p>
+        </p:txBody>
+      </p:sp>
+      <p:sp>
+        <p:nvSpPr>
+          <p:cNvPr id="4" name="Date Placeholder 3">
+            <a:extLst>
+              <a:ext uri="{FF2B5EF4-FFF2-40B4-BE49-F238E27FC236}">
+                <a16:creationId xmlns:a16="http://schemas.microsoft.com/office/drawing/2014/main" id="{19E8CF49-0B82-4EE5-80F6-C8C07051D5B7}"/>
+              </a:ext>
+            </a:extLst>
+          </p:cNvPr>
           <p:cNvSpPr>
             <a:spLocks noGrp="1"/>
           </p:cNvSpPr>
@@ -2697,8 +2897,8 @@
         </p:nvSpPr>
         <p:spPr>
           <a:xfrm>
-            <a:off x="457200" y="6356350"/>
-            <a:ext cx="2133600" cy="365125"/>
+            <a:off x="838200" y="6356350"/>
+            <a:ext cx="2743200" cy="365125"/>
           </a:xfrm>
           <a:prstGeom prst="rect">
             <a:avLst/>
@@ -2718,9 +2918,9 @@
             </a:lvl1pPr>
           </a:lstStyle>
           <a:p>
-            <a:fld id="{5BCAD085-E8A6-8845-BD4E-CB4CCA059FC4}" type="datetimeFigureOut">
+            <a:fld id="{B55CAEFD-F031-424F-9422-B2C0B702207F}" type="datetimeFigureOut">
               <a:rPr lang="en-US" smtClean="0"/>
-              <a:t>1/27/13</a:t>
+              <a:t>6/25/2021</a:t>
             </a:fld>
             <a:endParaRPr lang="en-US"/>
           </a:p>
@@ -2728,7 +2928,13 @@
       </p:sp>
       <p:sp>
         <p:nvSpPr>
-          <p:cNvPr id="5" name="Footer Placeholder 4"/>
+          <p:cNvPr id="5" name="Footer Placeholder 4">
+            <a:extLst>
+              <a:ext uri="{FF2B5EF4-FFF2-40B4-BE49-F238E27FC236}">
+                <a16:creationId xmlns:a16="http://schemas.microsoft.com/office/drawing/2014/main" id="{DEC99601-0382-4F90-98B8-74133653E77E}"/>
+              </a:ext>
+            </a:extLst>
+          </p:cNvPr>
           <p:cNvSpPr>
             <a:spLocks noGrp="1"/>
           </p:cNvSpPr>
@@ -2738,8 +2944,8 @@
         </p:nvSpPr>
         <p:spPr>
           <a:xfrm>
-            <a:off x="3124200" y="6356350"/>
-            <a:ext cx="2895600" cy="365125"/>
+            <a:off x="4038600" y="6356350"/>
+            <a:ext cx="4114800" cy="365125"/>
           </a:xfrm>
           <a:prstGeom prst="rect">
             <a:avLst/>
@@ -2765,7 +2971,13 @@
       </p:sp>
       <p:sp>
         <p:nvSpPr>
-          <p:cNvPr id="6" name="Slide Number Placeholder 5"/>
+          <p:cNvPr id="6" name="Slide Number Placeholder 5">
+            <a:extLst>
+              <a:ext uri="{FF2B5EF4-FFF2-40B4-BE49-F238E27FC236}">
+                <a16:creationId xmlns:a16="http://schemas.microsoft.com/office/drawing/2014/main" id="{FD46ED40-23F0-4CFF-9CE5-BDE8D36D676C}"/>
+              </a:ext>
+            </a:extLst>
+          </p:cNvPr>
           <p:cNvSpPr>
             <a:spLocks noGrp="1"/>
           </p:cNvSpPr>
@@ -2775,8 +2987,8 @@
         </p:nvSpPr>
         <p:spPr>
           <a:xfrm>
-            <a:off x="6553200" y="6356350"/>
-            <a:ext cx="2133600" cy="365125"/>
+            <a:off x="8610600" y="6356350"/>
+            <a:ext cx="2743200" cy="365125"/>
           </a:xfrm>
           <a:prstGeom prst="rect">
             <a:avLst/>
@@ -2796,7 +3008,7 @@
             </a:lvl1pPr>
           </a:lstStyle>
           <a:p>
-            <a:fld id="{C1FF6DA9-008F-8B48-92A6-B652298478BF}" type="slidenum">
+            <a:fld id="{8951AC35-B36C-4D75-A6AF-F09D66D83A88}" type="slidenum">
               <a:rPr lang="en-US" smtClean="0"/>
               <a:t>‹#›</a:t>
             </a:fld>
@@ -2807,7 +3019,7 @@
     </p:spTree>
     <p:extLst>
       <p:ext uri="{BB962C8B-B14F-4D97-AF65-F5344CB8AC3E}">
-        <p14:creationId xmlns:p14="http://schemas.microsoft.com/office/powerpoint/2010/main" val="2209977519"/>
+        <p14:creationId xmlns:p14="http://schemas.microsoft.com/office/powerpoint/2010/main" val="700882912"/>
       </p:ext>
     </p:extLst>
   </p:cSld>
@@ -2827,7 +3039,10 @@
   </p:sldLayoutIdLst>
   <p:txStyles>
     <p:titleStyle>
-      <a:lvl1pPr algn="ctr" defTabSz="457200" rtl="0" eaLnBrk="1" latinLnBrk="0" hangingPunct="1">
+      <a:lvl1pPr algn="l" defTabSz="914400" rtl="0" eaLnBrk="1" latinLnBrk="0" hangingPunct="1">
+        <a:lnSpc>
+          <a:spcPct val="90000"/>
+        </a:lnSpc>
         <a:spcBef>
           <a:spcPct val="0"/>
         </a:spcBef>
@@ -2843,13 +3058,16 @@
       </a:lvl1pPr>
     </p:titleStyle>
     <p:bodyStyle>
-      <a:lvl1pPr marL="342900" indent="-342900" algn="l" defTabSz="457200" rtl="0" eaLnBrk="1" latinLnBrk="0" hangingPunct="1">
+      <a:lvl1pPr marL="228600" indent="-228600" algn="l" defTabSz="914400" rtl="0" eaLnBrk="1" latinLnBrk="0" hangingPunct="1">
+        <a:lnSpc>
+          <a:spcPct val="90000"/>
+        </a:lnSpc>
         <a:spcBef>
-          <a:spcPct val="20000"/>
+          <a:spcPts val="1000"/>
         </a:spcBef>
-        <a:buFont typeface="Arial"/>
+        <a:buFont typeface="Arial" panose="020B0604020202020204" pitchFamily="34" charset="0"/>
         <a:buChar char="•"/>
-        <a:defRPr sz="3200" kern="1200">
+        <a:defRPr sz="2800" kern="1200">
           <a:solidFill>
             <a:schemeClr val="tx1"/>
           </a:solidFill>
@@ -2858,26 +3076,14 @@
           <a:cs typeface="+mn-cs"/>
         </a:defRPr>
       </a:lvl1pPr>
-      <a:lvl2pPr marL="742950" indent="-285750" algn="l" defTabSz="457200" rtl="0" eaLnBrk="1" latinLnBrk="0" hangingPunct="1">
+      <a:lvl2pPr marL="685800" indent="-228600" algn="l" defTabSz="914400" rtl="0" eaLnBrk="1" latinLnBrk="0" hangingPunct="1">
+        <a:lnSpc>
+          <a:spcPct val="90000"/>
+        </a:lnSpc>
         <a:spcBef>
-          <a:spcPct val="20000"/>
+          <a:spcPts val="500"/>
         </a:spcBef>
-        <a:buFont typeface="Arial"/>
-        <a:buChar char="–"/>
-        <a:defRPr sz="2800" kern="1200">
-          <a:solidFill>
-            <a:schemeClr val="tx1"/>
-          </a:solidFill>
-          <a:latin typeface="+mn-lt"/>
-          <a:ea typeface="+mn-ea"/>
-          <a:cs typeface="+mn-cs"/>
-        </a:defRPr>
-      </a:lvl2pPr>
-      <a:lvl3pPr marL="1143000" indent="-228600" algn="l" defTabSz="457200" rtl="0" eaLnBrk="1" latinLnBrk="0" hangingPunct="1">
-        <a:spcBef>
-          <a:spcPct val="20000"/>
-        </a:spcBef>
-        <a:buFont typeface="Arial"/>
+        <a:buFont typeface="Arial" panose="020B0604020202020204" pitchFamily="34" charset="0"/>
         <a:buChar char="•"/>
         <a:defRPr sz="2400" kern="1200">
           <a:solidFill>
@@ -2887,42 +3093,15 @@
           <a:ea typeface="+mn-ea"/>
           <a:cs typeface="+mn-cs"/>
         </a:defRPr>
-      </a:lvl3pPr>
-      <a:lvl4pPr marL="1600200" indent="-228600" algn="l" defTabSz="457200" rtl="0" eaLnBrk="1" latinLnBrk="0" hangingPunct="1">
+      </a:lvl2pPr>
+      <a:lvl3pPr marL="1143000" indent="-228600" algn="l" defTabSz="914400" rtl="0" eaLnBrk="1" latinLnBrk="0" hangingPunct="1">
+        <a:lnSpc>
+          <a:spcPct val="90000"/>
+        </a:lnSpc>
         <a:spcBef>
-          <a:spcPct val="20000"/>
+          <a:spcPts val="500"/>
         </a:spcBef>
-        <a:buFont typeface="Arial"/>
-        <a:buChar char="–"/>
-        <a:defRPr sz="2000" kern="1200">
-          <a:solidFill>
-            <a:schemeClr val="tx1"/>
-          </a:solidFill>
-          <a:latin typeface="+mn-lt"/>
-          <a:ea typeface="+mn-ea"/>
-          <a:cs typeface="+mn-cs"/>
-        </a:defRPr>
-      </a:lvl4pPr>
-      <a:lvl5pPr marL="2057400" indent="-228600" algn="l" defTabSz="457200" rtl="0" eaLnBrk="1" latinLnBrk="0" hangingPunct="1">
-        <a:spcBef>
-          <a:spcPct val="20000"/>
-        </a:spcBef>
-        <a:buFont typeface="Arial"/>
-        <a:buChar char="»"/>
-        <a:defRPr sz="2000" kern="1200">
-          <a:solidFill>
-            <a:schemeClr val="tx1"/>
-          </a:solidFill>
-          <a:latin typeface="+mn-lt"/>
-          <a:ea typeface="+mn-ea"/>
-          <a:cs typeface="+mn-cs"/>
-        </a:defRPr>
-      </a:lvl5pPr>
-      <a:lvl6pPr marL="2514600" indent="-228600" algn="l" defTabSz="457200" rtl="0" eaLnBrk="1" latinLnBrk="0" hangingPunct="1">
-        <a:spcBef>
-          <a:spcPct val="20000"/>
-        </a:spcBef>
-        <a:buFont typeface="Arial"/>
+        <a:buFont typeface="Arial" panose="020B0604020202020204" pitchFamily="34" charset="0"/>
         <a:buChar char="•"/>
         <a:defRPr sz="2000" kern="1200">
           <a:solidFill>
@@ -2932,14 +3111,71 @@
           <a:ea typeface="+mn-ea"/>
           <a:cs typeface="+mn-cs"/>
         </a:defRPr>
+      </a:lvl3pPr>
+      <a:lvl4pPr marL="1600200" indent="-228600" algn="l" defTabSz="914400" rtl="0" eaLnBrk="1" latinLnBrk="0" hangingPunct="1">
+        <a:lnSpc>
+          <a:spcPct val="90000"/>
+        </a:lnSpc>
+        <a:spcBef>
+          <a:spcPts val="500"/>
+        </a:spcBef>
+        <a:buFont typeface="Arial" panose="020B0604020202020204" pitchFamily="34" charset="0"/>
+        <a:buChar char="•"/>
+        <a:defRPr sz="1800" kern="1200">
+          <a:solidFill>
+            <a:schemeClr val="tx1"/>
+          </a:solidFill>
+          <a:latin typeface="+mn-lt"/>
+          <a:ea typeface="+mn-ea"/>
+          <a:cs typeface="+mn-cs"/>
+        </a:defRPr>
+      </a:lvl4pPr>
+      <a:lvl5pPr marL="2057400" indent="-228600" algn="l" defTabSz="914400" rtl="0" eaLnBrk="1" latinLnBrk="0" hangingPunct="1">
+        <a:lnSpc>
+          <a:spcPct val="90000"/>
+        </a:lnSpc>
+        <a:spcBef>
+          <a:spcPts val="500"/>
+        </a:spcBef>
+        <a:buFont typeface="Arial" panose="020B0604020202020204" pitchFamily="34" charset="0"/>
+        <a:buChar char="•"/>
+        <a:defRPr sz="1800" kern="1200">
+          <a:solidFill>
+            <a:schemeClr val="tx1"/>
+          </a:solidFill>
+          <a:latin typeface="+mn-lt"/>
+          <a:ea typeface="+mn-ea"/>
+          <a:cs typeface="+mn-cs"/>
+        </a:defRPr>
+      </a:lvl5pPr>
+      <a:lvl6pPr marL="2514600" indent="-228600" algn="l" defTabSz="914400" rtl="0" eaLnBrk="1" latinLnBrk="0" hangingPunct="1">
+        <a:lnSpc>
+          <a:spcPct val="90000"/>
+        </a:lnSpc>
+        <a:spcBef>
+          <a:spcPts val="500"/>
+        </a:spcBef>
+        <a:buFont typeface="Arial" panose="020B0604020202020204" pitchFamily="34" charset="0"/>
+        <a:buChar char="•"/>
+        <a:defRPr sz="1800" kern="1200">
+          <a:solidFill>
+            <a:schemeClr val="tx1"/>
+          </a:solidFill>
+          <a:latin typeface="+mn-lt"/>
+          <a:ea typeface="+mn-ea"/>
+          <a:cs typeface="+mn-cs"/>
+        </a:defRPr>
       </a:lvl6pPr>
-      <a:lvl7pPr marL="2971800" indent="-228600" algn="l" defTabSz="457200" rtl="0" eaLnBrk="1" latinLnBrk="0" hangingPunct="1">
+      <a:lvl7pPr marL="2971800" indent="-228600" algn="l" defTabSz="914400" rtl="0" eaLnBrk="1" latinLnBrk="0" hangingPunct="1">
+        <a:lnSpc>
+          <a:spcPct val="90000"/>
+        </a:lnSpc>
         <a:spcBef>
-          <a:spcPct val="20000"/>
+          <a:spcPts val="500"/>
         </a:spcBef>
-        <a:buFont typeface="Arial"/>
+        <a:buFont typeface="Arial" panose="020B0604020202020204" pitchFamily="34" charset="0"/>
         <a:buChar char="•"/>
-        <a:defRPr sz="2000" kern="1200">
+        <a:defRPr sz="1800" kern="1200">
           <a:solidFill>
             <a:schemeClr val="tx1"/>
           </a:solidFill>
@@ -2948,13 +3184,16 @@
           <a:cs typeface="+mn-cs"/>
         </a:defRPr>
       </a:lvl7pPr>
-      <a:lvl8pPr marL="3429000" indent="-228600" algn="l" defTabSz="457200" rtl="0" eaLnBrk="1" latinLnBrk="0" hangingPunct="1">
+      <a:lvl8pPr marL="3429000" indent="-228600" algn="l" defTabSz="914400" rtl="0" eaLnBrk="1" latinLnBrk="0" hangingPunct="1">
+        <a:lnSpc>
+          <a:spcPct val="90000"/>
+        </a:lnSpc>
         <a:spcBef>
-          <a:spcPct val="20000"/>
+          <a:spcPts val="500"/>
         </a:spcBef>
-        <a:buFont typeface="Arial"/>
+        <a:buFont typeface="Arial" panose="020B0604020202020204" pitchFamily="34" charset="0"/>
         <a:buChar char="•"/>
-        <a:defRPr sz="2000" kern="1200">
+        <a:defRPr sz="1800" kern="1200">
           <a:solidFill>
             <a:schemeClr val="tx1"/>
           </a:solidFill>
@@ -2963,13 +3202,16 @@
           <a:cs typeface="+mn-cs"/>
         </a:defRPr>
       </a:lvl8pPr>
-      <a:lvl9pPr marL="3886200" indent="-228600" algn="l" defTabSz="457200" rtl="0" eaLnBrk="1" latinLnBrk="0" hangingPunct="1">
+      <a:lvl9pPr marL="3886200" indent="-228600" algn="l" defTabSz="914400" rtl="0" eaLnBrk="1" latinLnBrk="0" hangingPunct="1">
+        <a:lnSpc>
+          <a:spcPct val="90000"/>
+        </a:lnSpc>
         <a:spcBef>
-          <a:spcPct val="20000"/>
+          <a:spcPts val="500"/>
         </a:spcBef>
-        <a:buFont typeface="Arial"/>
+        <a:buFont typeface="Arial" panose="020B0604020202020204" pitchFamily="34" charset="0"/>
         <a:buChar char="•"/>
-        <a:defRPr sz="2000" kern="1200">
+        <a:defRPr sz="1800" kern="1200">
           <a:solidFill>
             <a:schemeClr val="tx1"/>
           </a:solidFill>
@@ -2983,7 +3225,7 @@
       <a:defPPr>
         <a:defRPr lang="en-US"/>
       </a:defPPr>
-      <a:lvl1pPr marL="0" algn="l" defTabSz="457200" rtl="0" eaLnBrk="1" latinLnBrk="0" hangingPunct="1">
+      <a:lvl1pPr marL="0" algn="l" defTabSz="914400" rtl="0" eaLnBrk="1" latinLnBrk="0" hangingPunct="1">
         <a:defRPr sz="1800" kern="1200">
           <a:solidFill>
             <a:schemeClr val="tx1"/>
@@ -2993,7 +3235,7 @@
           <a:cs typeface="+mn-cs"/>
         </a:defRPr>
       </a:lvl1pPr>
-      <a:lvl2pPr marL="457200" algn="l" defTabSz="457200" rtl="0" eaLnBrk="1" latinLnBrk="0" hangingPunct="1">
+      <a:lvl2pPr marL="457200" algn="l" defTabSz="914400" rtl="0" eaLnBrk="1" latinLnBrk="0" hangingPunct="1">
         <a:defRPr sz="1800" kern="1200">
           <a:solidFill>
             <a:schemeClr val="tx1"/>
@@ -3003,7 +3245,7 @@
           <a:cs typeface="+mn-cs"/>
         </a:defRPr>
       </a:lvl2pPr>
-      <a:lvl3pPr marL="914400" algn="l" defTabSz="457200" rtl="0" eaLnBrk="1" latinLnBrk="0" hangingPunct="1">
+      <a:lvl3pPr marL="914400" algn="l" defTabSz="914400" rtl="0" eaLnBrk="1" latinLnBrk="0" hangingPunct="1">
         <a:defRPr sz="1800" kern="1200">
           <a:solidFill>
             <a:schemeClr val="tx1"/>
@@ -3013,7 +3255,7 @@
           <a:cs typeface="+mn-cs"/>
         </a:defRPr>
       </a:lvl3pPr>
-      <a:lvl4pPr marL="1371600" algn="l" defTabSz="457200" rtl="0" eaLnBrk="1" latinLnBrk="0" hangingPunct="1">
+      <a:lvl4pPr marL="1371600" algn="l" defTabSz="914400" rtl="0" eaLnBrk="1" latinLnBrk="0" hangingPunct="1">
         <a:defRPr sz="1800" kern="1200">
           <a:solidFill>
             <a:schemeClr val="tx1"/>
@@ -3023,7 +3265,7 @@
           <a:cs typeface="+mn-cs"/>
         </a:defRPr>
       </a:lvl4pPr>
-      <a:lvl5pPr marL="1828800" algn="l" defTabSz="457200" rtl="0" eaLnBrk="1" latinLnBrk="0" hangingPunct="1">
+      <a:lvl5pPr marL="1828800" algn="l" defTabSz="914400" rtl="0" eaLnBrk="1" latinLnBrk="0" hangingPunct="1">
         <a:defRPr sz="1800" kern="1200">
           <a:solidFill>
             <a:schemeClr val="tx1"/>
@@ -3033,7 +3275,7 @@
           <a:cs typeface="+mn-cs"/>
         </a:defRPr>
       </a:lvl5pPr>
-      <a:lvl6pPr marL="2286000" algn="l" defTabSz="457200" rtl="0" eaLnBrk="1" latinLnBrk="0" hangingPunct="1">
+      <a:lvl6pPr marL="2286000" algn="l" defTabSz="914400" rtl="0" eaLnBrk="1" latinLnBrk="0" hangingPunct="1">
         <a:defRPr sz="1800" kern="1200">
           <a:solidFill>
             <a:schemeClr val="tx1"/>
@@ -3043,7 +3285,7 @@
           <a:cs typeface="+mn-cs"/>
         </a:defRPr>
       </a:lvl6pPr>
-      <a:lvl7pPr marL="2743200" algn="l" defTabSz="457200" rtl="0" eaLnBrk="1" latinLnBrk="0" hangingPunct="1">
+      <a:lvl7pPr marL="2743200" algn="l" defTabSz="914400" rtl="0" eaLnBrk="1" latinLnBrk="0" hangingPunct="1">
         <a:defRPr sz="1800" kern="1200">
           <a:solidFill>
             <a:schemeClr val="tx1"/>
@@ -3053,7 +3295,7 @@
           <a:cs typeface="+mn-cs"/>
         </a:defRPr>
       </a:lvl7pPr>
-      <a:lvl8pPr marL="3200400" algn="l" defTabSz="457200" rtl="0" eaLnBrk="1" latinLnBrk="0" hangingPunct="1">
+      <a:lvl8pPr marL="3200400" algn="l" defTabSz="914400" rtl="0" eaLnBrk="1" latinLnBrk="0" hangingPunct="1">
         <a:defRPr sz="1800" kern="1200">
           <a:solidFill>
             <a:schemeClr val="tx1"/>
@@ -3063,7 +3305,7 @@
           <a:cs typeface="+mn-cs"/>
         </a:defRPr>
       </a:lvl8pPr>
-      <a:lvl9pPr marL="3657600" algn="l" defTabSz="457200" rtl="0" eaLnBrk="1" latinLnBrk="0" hangingPunct="1">
+      <a:lvl9pPr marL="3657600" algn="l" defTabSz="914400" rtl="0" eaLnBrk="1" latinLnBrk="0" hangingPunct="1">
         <a:defRPr sz="1800" kern="1200">
           <a:solidFill>
             <a:schemeClr val="tx1"/>
@@ -3096,8 +3338,8 @@
         </p:nvSpPr>
         <p:spPr>
           <a:xfrm>
-            <a:off x="5728260" y="132588"/>
-            <a:ext cx="1855089" cy="987552"/>
+            <a:off x="5728716" y="132588"/>
+            <a:ext cx="1855317" cy="987552"/>
           </a:xfrm>
           <a:prstGeom prst="flowChartDecision">
             <a:avLst/>
@@ -3107,7 +3349,7 @@
           <a:lnRef idx="1">
             <a:schemeClr val="accent1"/>
           </a:lnRef>
-          <a:fillRef idx="3">
+          <a:fillRef idx="1">
             <a:schemeClr val="accent1"/>
           </a:fillRef>
           <a:effectRef idx="2">
@@ -3118,10 +3360,12 @@
           </a:fontRef>
         </p:style>
         <p:txBody>
-          <a:bodyPr rtlCol="0" anchor="ctr"/>
-          <a:lstStyle/>
-          <a:p>
-            <a:r>
+          <a:bodyPr rtlCol="0" anchor="ctr" wrap="square"/>
+          <a:lstStyle/>
+          <a:p>
+            <a:pPr algn="ctr"/>
+            <a:r>
+              <a:rPr sz="1400"/>
               <a:t>Are the Assets Artistic?</a:t>
             </a:r>
           </a:p>
@@ -3135,7 +3379,7 @@
         </p:nvSpPr>
         <p:spPr>
           <a:xfrm>
-            <a:off x="3700272" y="911352"/>
+            <a:off x="3700576" y="911656"/>
             <a:ext cx="2395728" cy="1014984"/>
           </a:xfrm>
           <a:prstGeom prst="flowChartDecision">
@@ -3146,7 +3390,7 @@
           <a:lnRef idx="1">
             <a:schemeClr val="accent1"/>
           </a:lnRef>
-          <a:fillRef idx="3">
+          <a:fillRef idx="1">
             <a:schemeClr val="accent1"/>
           </a:fillRef>
           <a:effectRef idx="2">
@@ -3157,10 +3401,12 @@
           </a:fontRef>
         </p:style>
         <p:txBody>
-          <a:bodyPr rtlCol="0" anchor="ctr"/>
-          <a:lstStyle/>
-          <a:p>
-            <a:r>
+          <a:bodyPr rtlCol="0" anchor="ctr" wrap="square"/>
+          <a:lstStyle/>
+          <a:p>
+            <a:pPr algn="ctr"/>
+            <a:r>
+              <a:rPr sz="1400"/>
               <a:t>Assets Reside at a School or Nonprofit?</a:t>
             </a:r>
           </a:p>
@@ -3174,7 +3420,7 @@
         </p:nvSpPr>
         <p:spPr>
           <a:xfrm>
-            <a:off x="1455384" y="1796796"/>
+            <a:off x="1455724" y="1796796"/>
             <a:ext cx="2606040" cy="1133856"/>
           </a:xfrm>
           <a:prstGeom prst="flowChartDecision">
@@ -3185,7 +3431,7 @@
           <a:lnRef idx="1">
             <a:schemeClr val="accent1"/>
           </a:lnRef>
-          <a:fillRef idx="3">
+          <a:fillRef idx="1">
             <a:schemeClr val="accent1"/>
           </a:fillRef>
           <a:effectRef idx="2">
@@ -3196,10 +3442,12 @@
           </a:fontRef>
         </p:style>
         <p:txBody>
-          <a:bodyPr rtlCol="0" anchor="ctr"/>
-          <a:lstStyle/>
-          <a:p>
-            <a:r>
+          <a:bodyPr rtlCol="0" anchor="ctr" wrap="square"/>
+          <a:lstStyle/>
+          <a:p>
+            <a:pPr algn="ctr"/>
+            <a:r>
+              <a:rPr sz="1400"/>
               <a:t>School or Nonprofit will Accept Gift of  Artistic Assets?</a:t>
             </a:r>
           </a:p>
@@ -3207,16 +3455,16 @@
       </p:sp>
       <p:sp>
         <p:nvSpPr>
-          <p:cNvPr id="5" name="flowChartProcess 4"/>
+          <p:cNvPr id="5" name="flowChartDecision 4"/>
           <p:cNvSpPr/>
           <p:nvPr/>
         </p:nvSpPr>
         <p:spPr>
           <a:xfrm>
-            <a:off x="150876" y="5690616"/>
-            <a:ext cx="1508760" cy="972312"/>
-          </a:xfrm>
-          <a:prstGeom prst="flowChartProcess">
+            <a:off x="7235647" y="1063447"/>
+            <a:ext cx="2395728" cy="1014984"/>
+          </a:xfrm>
+          <a:prstGeom prst="flowChartDecision">
             <a:avLst/>
           </a:prstGeom>
         </p:spPr>
@@ -3224,7 +3472,7 @@
           <a:lnRef idx="1">
             <a:schemeClr val="accent1"/>
           </a:lnRef>
-          <a:fillRef idx="3">
+          <a:fillRef idx="1">
             <a:schemeClr val="accent1"/>
           </a:fillRef>
           <a:effectRef idx="2">
@@ -3235,27 +3483,29 @@
           </a:fontRef>
         </p:style>
         <p:txBody>
-          <a:bodyPr rtlCol="0" anchor="ctr"/>
-          <a:lstStyle/>
-          <a:p>
-            <a:r>
-              <a:t>A) Artistic Assets gifted to school or non-profit where they reside</a:t>
-            </a:r>
-          </a:p>
-        </p:txBody>
-      </p:sp>
-      <p:sp>
-        <p:nvSpPr>
-          <p:cNvPr id="6" name="flowChartProcess 5"/>
+          <a:bodyPr rtlCol="0" anchor="ctr" wrap="square"/>
+          <a:lstStyle/>
+          <a:p>
+            <a:pPr algn="ctr"/>
+            <a:r>
+              <a:rPr sz="1400"/>
+              <a:t>Are Assets Monetary?</a:t>
+            </a:r>
+          </a:p>
+        </p:txBody>
+      </p:sp>
+      <p:sp>
+        <p:nvSpPr>
+          <p:cNvPr id="6" name="flowChartDecision 5"/>
           <p:cNvSpPr/>
           <p:nvPr/>
         </p:nvSpPr>
         <p:spPr>
           <a:xfrm>
-            <a:off x="3443538" y="4507992"/>
-            <a:ext cx="2370812" cy="2154936"/>
-          </a:xfrm>
-          <a:prstGeom prst="flowChartProcess">
+            <a:off x="9037015" y="1876348"/>
+            <a:ext cx="2395728" cy="1133856"/>
+          </a:xfrm>
+          <a:prstGeom prst="flowChartDecision">
             <a:avLst/>
           </a:prstGeom>
         </p:spPr>
@@ -3263,7 +3513,7 @@
           <a:lnRef idx="1">
             <a:schemeClr val="accent1"/>
           </a:lnRef>
-          <a:fillRef idx="3">
+          <a:fillRef idx="1">
             <a:schemeClr val="accent1"/>
           </a:fillRef>
           <a:effectRef idx="2">
@@ -3274,27 +3524,29 @@
           </a:fontRef>
         </p:style>
         <p:txBody>
-          <a:bodyPr rtlCol="0" anchor="ctr"/>
-          <a:lstStyle/>
-          <a:p>
-            <a:r>
-              <a:t>C) Artistic assets distributed equally among other affiliate schools where assets reside (or their specified non-profits).  Receiving schools must pay for associated packaging and transportation costs beyond what the St. Luke Guild monetary assets will cover.</a:t>
-            </a:r>
-          </a:p>
-        </p:txBody>
-      </p:sp>
-      <p:sp>
-        <p:nvSpPr>
-          <p:cNvPr id="7" name="flowChartProcess 6"/>
+          <a:bodyPr rtlCol="0" anchor="ctr" wrap="square"/>
+          <a:lstStyle/>
+          <a:p>
+            <a:pPr algn="ctr"/>
+            <a:r>
+              <a:rPr sz="1400"/>
+              <a:t>Was money donated for a specific program?</a:t>
+            </a:r>
+          </a:p>
+        </p:txBody>
+      </p:sp>
+      <p:sp>
+        <p:nvSpPr>
+          <p:cNvPr id="7" name="flowChartDecision 6"/>
           <p:cNvSpPr/>
           <p:nvPr/>
         </p:nvSpPr>
         <p:spPr>
           <a:xfrm>
-            <a:off x="7729012" y="5675376"/>
-            <a:ext cx="1975104" cy="987552"/>
-          </a:xfrm>
-          <a:prstGeom prst="flowChartProcess">
+            <a:off x="2880360" y="2661818"/>
+            <a:ext cx="3215944" cy="1471269"/>
+          </a:xfrm>
+          <a:prstGeom prst="flowChartDecision">
             <a:avLst/>
           </a:prstGeom>
         </p:spPr>
@@ -3302,7 +3554,7 @@
           <a:lnRef idx="1">
             <a:schemeClr val="accent1"/>
           </a:lnRef>
-          <a:fillRef idx="3">
+          <a:fillRef idx="1">
             <a:schemeClr val="accent1"/>
           </a:fillRef>
           <a:effectRef idx="2">
@@ -3313,11 +3565,13 @@
           </a:fontRef>
         </p:style>
         <p:txBody>
-          <a:bodyPr rtlCol="0" anchor="ctr"/>
-          <a:lstStyle/>
-          <a:p>
-            <a:r>
-              <a:t>D) Monetary gifts tied to specific programs returned to original donors</a:t>
+          <a:bodyPr rtlCol="0" anchor="ctr" wrap="square"/>
+          <a:lstStyle/>
+          <a:p>
+            <a:pPr algn="ctr"/>
+            <a:r>
+              <a:rPr sz="1400"/>
+              <a:t>School or non-profit specifies alternate non-profit to receive artistic assets?</a:t>
             </a:r>
           </a:p>
         </p:txBody>
@@ -3330,8 +3584,8 @@
         </p:nvSpPr>
         <p:spPr>
           <a:xfrm>
-            <a:off x="9841687" y="5340096"/>
-            <a:ext cx="2255824" cy="1322832"/>
+            <a:off x="150876" y="5690311"/>
+            <a:ext cx="1508760" cy="972007"/>
           </a:xfrm>
           <a:prstGeom prst="flowChartProcess">
             <a:avLst/>
@@ -3341,7 +3595,7 @@
           <a:lnRef idx="1">
             <a:schemeClr val="accent1"/>
           </a:lnRef>
-          <a:fillRef idx="3">
+          <a:fillRef idx="1">
             <a:schemeClr val="accent1"/>
           </a:fillRef>
           <a:effectRef idx="2">
@@ -3352,11 +3606,13 @@
           </a:fontRef>
         </p:style>
         <p:txBody>
-          <a:bodyPr rtlCol="0" anchor="ctr"/>
-          <a:lstStyle/>
-          <a:p>
-            <a:r>
-              <a:t>F) Remaining monetary assets not used for distributing artistic assets distributed equally among schools where artistic assets reside</a:t>
+          <a:bodyPr rtlCol="0" anchor="ctr" wrap="square"/>
+          <a:lstStyle/>
+          <a:p>
+            <a:pPr algn="ctr"/>
+            <a:r>
+              <a:rPr sz="1400"/>
+              <a:t>A) Artistic Assets gifted to school or non-profit where they reside</a:t>
             </a:r>
           </a:p>
         </p:txBody>
@@ -3369,8 +3625,8 @@
         </p:nvSpPr>
         <p:spPr>
           <a:xfrm>
-            <a:off x="5951921" y="5675376"/>
-            <a:ext cx="1639520" cy="987552"/>
+            <a:off x="1796796" y="5340096"/>
+            <a:ext cx="1508760" cy="1323136"/>
           </a:xfrm>
           <a:prstGeom prst="flowChartProcess">
             <a:avLst/>
@@ -3380,7 +3636,7 @@
           <a:lnRef idx="1">
             <a:schemeClr val="accent1"/>
           </a:lnRef>
-          <a:fillRef idx="3">
+          <a:fillRef idx="1">
             <a:schemeClr val="accent1"/>
           </a:fillRef>
           <a:effectRef idx="2">
@@ -3391,11 +3647,13 @@
           </a:fontRef>
         </p:style>
         <p:txBody>
-          <a:bodyPr rtlCol="0" anchor="ctr"/>
-          <a:lstStyle/>
-          <a:p>
-            <a:r>
-              <a:t>E) Non-monetary assets sold and proceeds enter general fund</a:t>
+          <a:bodyPr rtlCol="0" anchor="ctr" wrap="square"/>
+          <a:lstStyle/>
+          <a:p>
+            <a:pPr algn="ctr"/>
+            <a:r>
+              <a:rPr sz="1400"/>
+              <a:t>B) Artistic Assets gifted to non-profit specified by school or non-profit where the asset resides.</a:t>
             </a:r>
           </a:p>
         </p:txBody>
@@ -3408,8 +3666,8 @@
         </p:nvSpPr>
         <p:spPr>
           <a:xfrm>
-            <a:off x="1797207" y="5340096"/>
-            <a:ext cx="1508760" cy="1322832"/>
+            <a:off x="3443630" y="4507992"/>
+            <a:ext cx="2371039" cy="2154326"/>
           </a:xfrm>
           <a:prstGeom prst="flowChartProcess">
             <a:avLst/>
@@ -3419,7 +3677,7 @@
           <a:lnRef idx="1">
             <a:schemeClr val="accent1"/>
           </a:lnRef>
-          <a:fillRef idx="3">
+          <a:fillRef idx="1">
             <a:schemeClr val="accent1"/>
           </a:fillRef>
           <a:effectRef idx="2">
@@ -3430,27 +3688,29 @@
           </a:fontRef>
         </p:style>
         <p:txBody>
-          <a:bodyPr rtlCol="0" anchor="ctr"/>
-          <a:lstStyle/>
-          <a:p>
-            <a:r>
-              <a:t>B) Artistic Assets gifted to non-profit specified by school or non-profit where the asset resides.</a:t>
-            </a:r>
-          </a:p>
-        </p:txBody>
-      </p:sp>
-      <p:sp>
-        <p:nvSpPr>
-          <p:cNvPr id="11" name="flowChartDecision 10"/>
+          <a:bodyPr rtlCol="0" anchor="ctr" wrap="square"/>
+          <a:lstStyle/>
+          <a:p>
+            <a:pPr algn="ctr"/>
+            <a:r>
+              <a:rPr sz="1400"/>
+              <a:t>C) Artistic assets distributed equally among other affiliate schools where assets reside (or their specified non-profits).  Receiving schools must pay for associated packaging and transportation costs beyond what the St. Luke Guild monetary assets will cover.</a:t>
+            </a:r>
+          </a:p>
+        </p:txBody>
+      </p:sp>
+      <p:sp>
+        <p:nvSpPr>
+          <p:cNvPr id="11" name="flowChartProcess 10"/>
           <p:cNvSpPr/>
           <p:nvPr/>
         </p:nvSpPr>
         <p:spPr>
           <a:xfrm>
-            <a:off x="7235877" y="1063752"/>
-            <a:ext cx="2395728" cy="1014984"/>
-          </a:xfrm>
-          <a:prstGeom prst="flowChartDecision">
+            <a:off x="5952744" y="5675680"/>
+            <a:ext cx="1639519" cy="987552"/>
+          </a:xfrm>
+          <a:prstGeom prst="flowChartProcess">
             <a:avLst/>
           </a:prstGeom>
         </p:spPr>
@@ -3458,7 +3718,7 @@
           <a:lnRef idx="1">
             <a:schemeClr val="accent1"/>
           </a:lnRef>
-          <a:fillRef idx="3">
+          <a:fillRef idx="1">
             <a:schemeClr val="accent1"/>
           </a:fillRef>
           <a:effectRef idx="2">
@@ -3469,27 +3729,29 @@
           </a:fontRef>
         </p:style>
         <p:txBody>
-          <a:bodyPr rtlCol="0" anchor="ctr"/>
-          <a:lstStyle/>
-          <a:p>
-            <a:r>
-              <a:t>Are Assets Monetary?</a:t>
-            </a:r>
-          </a:p>
-        </p:txBody>
-      </p:sp>
-      <p:sp>
-        <p:nvSpPr>
-          <p:cNvPr id="12" name="flowChartDecision 11"/>
+          <a:bodyPr rtlCol="0" anchor="ctr" wrap="square"/>
+          <a:lstStyle/>
+          <a:p>
+            <a:pPr algn="ctr"/>
+            <a:r>
+              <a:rPr sz="1400"/>
+              <a:t>E) Non-monetary assets sold and proceeds enter general fund</a:t>
+            </a:r>
+          </a:p>
+        </p:txBody>
+      </p:sp>
+      <p:sp>
+        <p:nvSpPr>
+          <p:cNvPr id="12" name="flowChartProcess 11"/>
           <p:cNvSpPr/>
           <p:nvPr/>
         </p:nvSpPr>
         <p:spPr>
           <a:xfrm>
-            <a:off x="9037245" y="1876044"/>
-            <a:ext cx="2395728" cy="1133856"/>
-          </a:xfrm>
-          <a:prstGeom prst="flowChartDecision">
+            <a:off x="7729423" y="5675680"/>
+            <a:ext cx="1975104" cy="987552"/>
+          </a:xfrm>
+          <a:prstGeom prst="flowChartProcess">
             <a:avLst/>
           </a:prstGeom>
         </p:spPr>
@@ -3497,7 +3759,7 @@
           <a:lnRef idx="1">
             <a:schemeClr val="accent1"/>
           </a:lnRef>
-          <a:fillRef idx="3">
+          <a:fillRef idx="1">
             <a:schemeClr val="accent1"/>
           </a:fillRef>
           <a:effectRef idx="2">
@@ -3508,45 +3770,58 @@
           </a:fontRef>
         </p:style>
         <p:txBody>
-          <a:bodyPr rtlCol="0" anchor="ctr"/>
-          <a:lstStyle/>
-          <a:p>
-            <a:r>
-              <a:t>Was money donated for a specific program?</a:t>
-            </a:r>
-          </a:p>
-        </p:txBody>
-      </p:sp>
-      <p:cxnSp>
-        <p:nvCxnSpPr>
-          <p:cNvPr id="13" name="Connector 12"/>
-          <p:cNvCxnSpPr/>
+          <a:bodyPr rtlCol="0" anchor="ctr" wrap="square"/>
+          <a:lstStyle/>
+          <a:p>
+            <a:pPr algn="ctr"/>
+            <a:r>
+              <a:rPr sz="1400"/>
+              <a:t>D) Monetary gifts tied to specific programs returned to original donors</a:t>
+            </a:r>
+          </a:p>
+        </p:txBody>
+      </p:sp>
+      <p:sp>
+        <p:nvSpPr>
+          <p:cNvPr id="13" name="flowChartProcess 12"/>
+          <p:cNvSpPr/>
           <p:nvPr/>
-        </p:nvCxnSpPr>
-        <p:spPr>
-          <a:xfrm>
-            <a:off x="9631605" y="1571244"/>
-            <a:ext cx="603504" cy="304800"/>
-          </a:xfrm>
-          <a:prstGeom prst="bentConnector2">
+        </p:nvSpPr>
+        <p:spPr>
+          <a:xfrm>
+            <a:off x="9841687" y="5340096"/>
+            <a:ext cx="2255824" cy="1323136"/>
+          </a:xfrm>
+          <a:prstGeom prst="flowChartProcess">
             <a:avLst/>
           </a:prstGeom>
         </p:spPr>
         <p:style>
-          <a:lnRef idx="2">
+          <a:lnRef idx="1">
             <a:schemeClr val="accent1"/>
           </a:lnRef>
-          <a:fillRef idx="0">
+          <a:fillRef idx="1">
             <a:schemeClr val="accent1"/>
           </a:fillRef>
-          <a:effectRef idx="1">
+          <a:effectRef idx="2">
             <a:schemeClr val="accent1"/>
           </a:effectRef>
           <a:fontRef idx="minor">
-            <a:schemeClr val="tx1"/>
+            <a:schemeClr val="lt1"/>
           </a:fontRef>
         </p:style>
-      </p:cxnSp>
+        <p:txBody>
+          <a:bodyPr rtlCol="0" anchor="ctr" wrap="square"/>
+          <a:lstStyle/>
+          <a:p>
+            <a:pPr algn="ctr"/>
+            <a:r>
+              <a:rPr sz="1400"/>
+              <a:t>F) Remaining monetary assets not used for distributing artistic assets distributed equally among schools where artistic assets reside</a:t>
+            </a:r>
+          </a:p>
+        </p:txBody>
+      </p:sp>
       <p:cxnSp>
         <p:nvCxnSpPr>
           <p:cNvPr id="14" name="Connector 13"/>
@@ -3554,13 +3829,16 @@
           <p:nvPr/>
         </p:nvCxnSpPr>
         <p:spPr>
-          <a:xfrm flipV="1">
-            <a:off x="6771681" y="1571244"/>
-            <a:ext cx="464196" cy="4104132"/>
+          <a:xfrm>
+            <a:off x="9631375" y="1570939"/>
+            <a:ext cx="603504" cy="305409"/>
           </a:xfrm>
           <a:prstGeom prst="bentConnector2">
             <a:avLst/>
           </a:prstGeom>
+          <a:ln>
+            <a:tailEnd type="triangle"/>
+          </a:ln>
         </p:spPr>
         <p:style>
           <a:lnRef idx="2">
@@ -3584,13 +3862,16 @@
           <p:nvPr/>
         </p:nvCxnSpPr>
         <p:spPr>
-          <a:xfrm flipV="1">
-            <a:off x="8716565" y="2442972"/>
-            <a:ext cx="320681" cy="3232404"/>
+          <a:xfrm flipH="1">
+            <a:off x="6772046" y="1570939"/>
+            <a:ext cx="463601" cy="4104741"/>
           </a:xfrm>
           <a:prstGeom prst="bentConnector2">
             <a:avLst/>
           </a:prstGeom>
+          <a:ln>
+            <a:tailEnd type="triangle"/>
+          </a:ln>
         </p:spPr>
         <p:style>
           <a:lnRef idx="2">
@@ -3615,12 +3896,15 @@
         </p:nvCxnSpPr>
         <p:spPr>
           <a:xfrm flipH="1">
-            <a:off x="10969599" y="2442972"/>
-            <a:ext cx="463374" cy="2897124"/>
-          </a:xfrm>
-          <a:prstGeom prst="bentConnector4">
+            <a:off x="8716975" y="2443276"/>
+            <a:ext cx="320040" cy="3232404"/>
+          </a:xfrm>
+          <a:prstGeom prst="bentConnector2">
             <a:avLst/>
           </a:prstGeom>
+          <a:ln>
+            <a:tailEnd type="triangle"/>
+          </a:ln>
         </p:spPr>
         <p:style>
           <a:lnRef idx="2">
@@ -3644,13 +3928,19 @@
           <p:nvPr/>
         </p:nvCxnSpPr>
         <p:spPr>
-          <a:xfrm>
-            <a:off x="7583349" y="626364"/>
-            <a:ext cx="850392" cy="437388"/>
-          </a:xfrm>
-          <a:prstGeom prst="bentConnector2">
-            <a:avLst/>
+          <a:xfrm flipH="1">
+            <a:off x="10969142" y="2443276"/>
+            <a:ext cx="463601" cy="2896820"/>
+          </a:xfrm>
+          <a:prstGeom prst="bentConnector4">
+            <a:avLst>
+              <a:gd name="adj1" fmla="val -49334"/>
+              <a:gd name="adj2" fmla="val 59784"/>
+            </a:avLst>
           </a:prstGeom>
+          <a:ln>
+            <a:tailEnd type="triangle"/>
+          </a:ln>
         </p:spPr>
         <p:style>
           <a:lnRef idx="2">
@@ -3674,13 +3964,16 @@
           <p:nvPr/>
         </p:nvCxnSpPr>
         <p:spPr>
-          <a:xfrm flipV="1">
-            <a:off x="4898136" y="626364"/>
-            <a:ext cx="830124" cy="284988"/>
+          <a:xfrm>
+            <a:off x="7583119" y="626364"/>
+            <a:ext cx="850392" cy="437083"/>
           </a:xfrm>
           <a:prstGeom prst="bentConnector2">
             <a:avLst/>
           </a:prstGeom>
+          <a:ln>
+            <a:tailEnd type="triangle"/>
+          </a:ln>
         </p:spPr>
         <p:style>
           <a:lnRef idx="2">
@@ -3704,13 +3997,16 @@
           <p:nvPr/>
         </p:nvCxnSpPr>
         <p:spPr>
-          <a:xfrm flipV="1">
-            <a:off x="905256" y="2363724"/>
-            <a:ext cx="550128" cy="3326892"/>
+          <a:xfrm flipH="1">
+            <a:off x="4898440" y="626364"/>
+            <a:ext cx="830276" cy="285292"/>
           </a:xfrm>
           <a:prstGeom prst="bentConnector2">
             <a:avLst/>
           </a:prstGeom>
+          <a:ln>
+            <a:tailEnd type="triangle"/>
+          </a:ln>
         </p:spPr>
         <p:style>
           <a:lnRef idx="2">
@@ -3727,45 +4023,39 @@
           </a:fontRef>
         </p:style>
       </p:cxnSp>
-      <p:sp>
-        <p:nvSpPr>
-          <p:cNvPr id="20" name="flowChartDecision 19"/>
-          <p:cNvSpPr/>
+      <p:cxnSp>
+        <p:nvCxnSpPr>
+          <p:cNvPr id="20" name="Connector 19"/>
+          <p:cNvCxnSpPr/>
           <p:nvPr/>
-        </p:nvSpPr>
-        <p:spPr>
-          <a:xfrm>
-            <a:off x="2880360" y="2662047"/>
-            <a:ext cx="3215640" cy="1471422"/>
-          </a:xfrm>
-          <a:prstGeom prst="flowChartDecision">
+        </p:nvCxnSpPr>
+        <p:spPr>
+          <a:xfrm flipH="1">
+            <a:off x="905256" y="2363724"/>
+            <a:ext cx="550468" cy="3326587"/>
+          </a:xfrm>
+          <a:prstGeom prst="bentConnector2">
             <a:avLst/>
           </a:prstGeom>
+          <a:ln>
+            <a:tailEnd type="triangle"/>
+          </a:ln>
         </p:spPr>
         <p:style>
-          <a:lnRef idx="1">
+          <a:lnRef idx="2">
             <a:schemeClr val="accent1"/>
           </a:lnRef>
-          <a:fillRef idx="3">
+          <a:fillRef idx="0">
             <a:schemeClr val="accent1"/>
           </a:fillRef>
-          <a:effectRef idx="2">
+          <a:effectRef idx="1">
             <a:schemeClr val="accent1"/>
           </a:effectRef>
           <a:fontRef idx="minor">
-            <a:schemeClr val="lt1"/>
+            <a:schemeClr val="tx1"/>
           </a:fontRef>
         </p:style>
-        <p:txBody>
-          <a:bodyPr rtlCol="0" anchor="ctr"/>
-          <a:lstStyle/>
-          <a:p>
-            <a:r>
-              <a:t>School or non-profit specifies alternate non-profit to receive artistic assets?</a:t>
-            </a:r>
-          </a:p>
-        </p:txBody>
-      </p:sp>
+      </p:cxnSp>
       <p:cxnSp>
         <p:nvCxnSpPr>
           <p:cNvPr id="21" name="Connector 20"/>
@@ -3773,13 +4063,16 @@
           <p:nvPr/>
         </p:nvCxnSpPr>
         <p:spPr>
-          <a:xfrm flipV="1">
-            <a:off x="2551588" y="3397758"/>
-            <a:ext cx="328773" cy="1942338"/>
+          <a:xfrm flipH="1">
+            <a:off x="2551176" y="3397910"/>
+            <a:ext cx="329184" cy="1942186"/>
           </a:xfrm>
           <a:prstGeom prst="bentConnector2">
             <a:avLst/>
           </a:prstGeom>
+          <a:ln>
+            <a:tailEnd type="triangle"/>
+          </a:ln>
         </p:spPr>
         <p:style>
           <a:lnRef idx="2">
@@ -3804,12 +4097,18 @@
         </p:nvCxnSpPr>
         <p:spPr>
           <a:xfrm flipH="1">
-            <a:off x="4628944" y="3397758"/>
-            <a:ext cx="1467056" cy="1110234"/>
+            <a:off x="4628692" y="3397910"/>
+            <a:ext cx="1467612" cy="1110082"/>
           </a:xfrm>
           <a:prstGeom prst="bentConnector4">
-            <a:avLst/>
+            <a:avLst>
+              <a:gd name="adj1" fmla="val -15582"/>
+              <a:gd name="adj2" fmla="val 83133"/>
+            </a:avLst>
           </a:prstGeom>
+          <a:ln>
+            <a:tailEnd type="triangle"/>
+          </a:ln>
         </p:spPr>
         <p:style>
           <a:lnRef idx="2">
@@ -3834,12 +4133,15 @@
         </p:nvCxnSpPr>
         <p:spPr>
           <a:xfrm>
-            <a:off x="4061424" y="2363724"/>
-            <a:ext cx="426756" cy="298323"/>
+            <a:off x="4061764" y="2363724"/>
+            <a:ext cx="426111" cy="298094"/>
           </a:xfrm>
           <a:prstGeom prst="bentConnector2">
             <a:avLst/>
           </a:prstGeom>
+          <a:ln>
+            <a:tailEnd type="triangle"/>
+          </a:ln>
         </p:spPr>
         <p:style>
           <a:lnRef idx="2">
@@ -3863,13 +4165,16 @@
           <p:nvPr/>
         </p:nvCxnSpPr>
         <p:spPr>
-          <a:xfrm flipV="1">
-            <a:off x="2758404" y="1418844"/>
-            <a:ext cx="941868" cy="377952"/>
+          <a:xfrm flipH="1">
+            <a:off x="2758744" y="1419148"/>
+            <a:ext cx="941832" cy="377648"/>
           </a:xfrm>
           <a:prstGeom prst="bentConnector2">
             <a:avLst/>
           </a:prstGeom>
+          <a:ln>
+            <a:tailEnd type="triangle"/>
+          </a:ln>
         </p:spPr>
         <p:style>
           <a:lnRef idx="2">
@@ -3894,12 +4199,15 @@
         </p:nvCxnSpPr>
         <p:spPr>
           <a:xfrm>
-            <a:off x="6096000" y="1418844"/>
-            <a:ext cx="240832" cy="2496122"/>
+            <a:off x="6096304" y="1419148"/>
+            <a:ext cx="240488" cy="2495398"/>
           </a:xfrm>
           <a:prstGeom prst="bentConnector2">
             <a:avLst/>
           </a:prstGeom>
+          <a:ln>
+            <a:tailEnd type="triangle"/>
+          </a:ln>
         </p:spPr>
         <p:style>
           <a:lnRef idx="2">
@@ -3918,194 +4226,149 @@
       </p:cxnSp>
       <p:sp>
         <p:nvSpPr>
-          <p:cNvPr id="26" name="Rectangle 25"/>
-          <p:cNvSpPr/>
+          <p:cNvPr id="26" name="TextBox 25"/>
+          <p:cNvSpPr txBox="1"/>
           <p:nvPr/>
         </p:nvSpPr>
         <p:spPr>
           <a:xfrm>
-            <a:off x="7660617" y="321171"/>
-            <a:ext cx="530391" cy="276999"/>
+            <a:off x="5047488" y="347472"/>
+            <a:ext cx="530352" cy="277063"/>
           </a:xfrm>
           <a:prstGeom prst="rect">
             <a:avLst/>
           </a:prstGeom>
-        </p:spPr>
-        <p:style>
-          <a:lnRef idx="1">
-            <a:schemeClr val="accent1"/>
-          </a:lnRef>
-          <a:fillRef idx="3">
-            <a:schemeClr val="accent1"/>
-          </a:fillRef>
-          <a:effectRef idx="2">
-            <a:schemeClr val="accent1"/>
-          </a:effectRef>
-          <a:fontRef idx="minor">
-            <a:schemeClr val="lt1"/>
-          </a:fontRef>
-        </p:style>
-        <p:txBody>
-          <a:bodyPr rtlCol="0" anchor="ctr"/>
-          <a:lstStyle/>
-          <a:p>
-            <a:r>
-              <a:t>No</a:t>
-            </a:r>
-          </a:p>
-        </p:txBody>
-      </p:sp>
-      <p:sp>
-        <p:nvSpPr>
-          <p:cNvPr id="27" name="Rectangle 26"/>
-          <p:cNvSpPr/>
+          <a:noFill/>
+        </p:spPr>
+        <p:txBody>
+          <a:bodyPr wrap="none">
+            <a:spAutoFit/>
+          </a:bodyPr>
+          <a:lstStyle/>
+          <a:p>
+            <a:pPr algn="ctr"/>
+            <a:r>
+              <a:rPr sz="1200"/>
+              <a:t>Yes</a:t>
+            </a:r>
+          </a:p>
+        </p:txBody>
+      </p:sp>
+      <p:sp>
+        <p:nvSpPr>
+          <p:cNvPr id="27" name="TextBox 26"/>
+          <p:cNvSpPr txBox="1"/>
           <p:nvPr/>
         </p:nvSpPr>
         <p:spPr>
           <a:xfrm>
-            <a:off x="6772672" y="1278427"/>
-            <a:ext cx="530391" cy="276999"/>
+            <a:off x="2958084" y="1122883"/>
+            <a:ext cx="530352" cy="277063"/>
           </a:xfrm>
           <a:prstGeom prst="rect">
             <a:avLst/>
           </a:prstGeom>
-        </p:spPr>
-        <p:style>
-          <a:lnRef idx="1">
-            <a:schemeClr val="accent1"/>
-          </a:lnRef>
-          <a:fillRef idx="3">
-            <a:schemeClr val="accent1"/>
-          </a:fillRef>
-          <a:effectRef idx="2">
-            <a:schemeClr val="accent1"/>
-          </a:effectRef>
-          <a:fontRef idx="minor">
-            <a:schemeClr val="lt1"/>
-          </a:fontRef>
-        </p:style>
-        <p:txBody>
-          <a:bodyPr rtlCol="0" anchor="ctr"/>
-          <a:lstStyle/>
-          <a:p>
-            <a:r>
-              <a:t>No</a:t>
-            </a:r>
-          </a:p>
-        </p:txBody>
-      </p:sp>
-      <p:sp>
-        <p:nvSpPr>
-          <p:cNvPr id="28" name="Rectangle 27"/>
-          <p:cNvSpPr/>
+          <a:noFill/>
+        </p:spPr>
+        <p:txBody>
+          <a:bodyPr wrap="none">
+            <a:spAutoFit/>
+          </a:bodyPr>
+          <a:lstStyle/>
+          <a:p>
+            <a:pPr algn="ctr"/>
+            <a:r>
+              <a:rPr sz="1200"/>
+              <a:t>Yes</a:t>
+            </a:r>
+          </a:p>
+        </p:txBody>
+      </p:sp>
+      <p:sp>
+        <p:nvSpPr>
+          <p:cNvPr id="28" name="TextBox 27"/>
+          <p:cNvSpPr txBox="1"/>
           <p:nvPr/>
         </p:nvSpPr>
         <p:spPr>
           <a:xfrm>
-            <a:off x="11292896" y="2165973"/>
-            <a:ext cx="530391" cy="276999"/>
+            <a:off x="833932" y="2099462"/>
+            <a:ext cx="530352" cy="277063"/>
           </a:xfrm>
           <a:prstGeom prst="rect">
             <a:avLst/>
           </a:prstGeom>
-        </p:spPr>
-        <p:style>
-          <a:lnRef idx="1">
-            <a:schemeClr val="accent1"/>
-          </a:lnRef>
-          <a:fillRef idx="3">
-            <a:schemeClr val="accent1"/>
-          </a:fillRef>
-          <a:effectRef idx="2">
-            <a:schemeClr val="accent1"/>
-          </a:effectRef>
-          <a:fontRef idx="minor">
-            <a:schemeClr val="lt1"/>
-          </a:fontRef>
-        </p:style>
-        <p:txBody>
-          <a:bodyPr rtlCol="0" anchor="ctr"/>
-          <a:lstStyle/>
-          <a:p>
-            <a:r>
-              <a:t>No</a:t>
-            </a:r>
-          </a:p>
-        </p:txBody>
-      </p:sp>
-      <p:sp>
-        <p:nvSpPr>
-          <p:cNvPr id="29" name="Rectangle 28"/>
-          <p:cNvSpPr/>
+          <a:noFill/>
+        </p:spPr>
+        <p:txBody>
+          <a:bodyPr wrap="none">
+            <a:spAutoFit/>
+          </a:bodyPr>
+          <a:lstStyle/>
+          <a:p>
+            <a:pPr algn="ctr"/>
+            <a:r>
+              <a:rPr sz="1200"/>
+              <a:t>Yes</a:t>
+            </a:r>
+          </a:p>
+        </p:txBody>
+      </p:sp>
+      <p:sp>
+        <p:nvSpPr>
+          <p:cNvPr id="29" name="TextBox 28"/>
+          <p:cNvSpPr txBox="1"/>
           <p:nvPr/>
         </p:nvSpPr>
         <p:spPr>
           <a:xfrm>
-            <a:off x="3980555" y="2155692"/>
-            <a:ext cx="530391" cy="276999"/>
+            <a:off x="2412187" y="3116275"/>
+            <a:ext cx="530352" cy="277063"/>
           </a:xfrm>
           <a:prstGeom prst="rect">
             <a:avLst/>
           </a:prstGeom>
-        </p:spPr>
-        <p:style>
-          <a:lnRef idx="1">
-            <a:schemeClr val="accent1"/>
-          </a:lnRef>
-          <a:fillRef idx="3">
-            <a:schemeClr val="accent1"/>
-          </a:fillRef>
-          <a:effectRef idx="2">
-            <a:schemeClr val="accent1"/>
-          </a:effectRef>
-          <a:fontRef idx="minor">
-            <a:schemeClr val="lt1"/>
-          </a:fontRef>
-        </p:style>
-        <p:txBody>
-          <a:bodyPr rtlCol="0" anchor="ctr"/>
-          <a:lstStyle/>
-          <a:p>
-            <a:r>
-              <a:t>No</a:t>
-            </a:r>
-          </a:p>
-        </p:txBody>
-      </p:sp>
-      <p:sp>
-        <p:nvSpPr>
-          <p:cNvPr id="30" name="Rectangle 29"/>
-          <p:cNvSpPr/>
+          <a:noFill/>
+        </p:spPr>
+        <p:txBody>
+          <a:bodyPr wrap="none">
+            <a:spAutoFit/>
+          </a:bodyPr>
+          <a:lstStyle/>
+          <a:p>
+            <a:pPr algn="ctr"/>
+            <a:r>
+              <a:rPr sz="1200"/>
+              <a:t>Yes</a:t>
+            </a:r>
+          </a:p>
+        </p:txBody>
+      </p:sp>
+      <p:sp>
+        <p:nvSpPr>
+          <p:cNvPr id="30" name="TextBox 29"/>
+          <p:cNvSpPr txBox="1"/>
           <p:nvPr/>
         </p:nvSpPr>
         <p:spPr>
           <a:xfrm>
-            <a:off x="5967829" y="3093720"/>
-            <a:ext cx="530391" cy="276999"/>
+            <a:off x="7659928" y="320954"/>
+            <a:ext cx="530352" cy="277063"/>
           </a:xfrm>
           <a:prstGeom prst="rect">
             <a:avLst/>
           </a:prstGeom>
-        </p:spPr>
-        <p:style>
-          <a:lnRef idx="1">
-            <a:schemeClr val="accent1"/>
-          </a:lnRef>
-          <a:fillRef idx="3">
-            <a:schemeClr val="accent1"/>
-          </a:fillRef>
-          <a:effectRef idx="2">
-            <a:schemeClr val="accent1"/>
-          </a:effectRef>
-          <a:fontRef idx="minor">
-            <a:schemeClr val="lt1"/>
-          </a:fontRef>
-        </p:style>
-        <p:txBody>
-          <a:bodyPr rtlCol="0" anchor="ctr"/>
-          <a:lstStyle/>
-          <a:p>
-            <a:r>
+          <a:noFill/>
+        </p:spPr>
+        <p:txBody>
+          <a:bodyPr wrap="none">
+            <a:spAutoFit/>
+          </a:bodyPr>
+          <a:lstStyle/>
+          <a:p>
+            <a:pPr algn="ctr"/>
+            <a:r>
+              <a:rPr sz="1200"/>
               <a:t>No</a:t>
             </a:r>
           </a:p>
@@ -4113,38 +4376,29 @@
       </p:sp>
       <p:sp>
         <p:nvSpPr>
-          <p:cNvPr id="31" name="Rectangle 30"/>
-          <p:cNvSpPr/>
+          <p:cNvPr id="31" name="TextBox 30"/>
+          <p:cNvSpPr txBox="1"/>
           <p:nvPr/>
         </p:nvSpPr>
         <p:spPr>
           <a:xfrm>
-            <a:off x="5967885" y="1165362"/>
-            <a:ext cx="530391" cy="276999"/>
+            <a:off x="6772046" y="1278331"/>
+            <a:ext cx="530352" cy="277063"/>
           </a:xfrm>
           <a:prstGeom prst="rect">
             <a:avLst/>
           </a:prstGeom>
-        </p:spPr>
-        <p:style>
-          <a:lnRef idx="1">
-            <a:schemeClr val="accent1"/>
-          </a:lnRef>
-          <a:fillRef idx="3">
-            <a:schemeClr val="accent1"/>
-          </a:fillRef>
-          <a:effectRef idx="2">
-            <a:schemeClr val="accent1"/>
-          </a:effectRef>
-          <a:fontRef idx="minor">
-            <a:schemeClr val="lt1"/>
-          </a:fontRef>
-        </p:style>
-        <p:txBody>
-          <a:bodyPr rtlCol="0" anchor="ctr"/>
-          <a:lstStyle/>
-          <a:p>
-            <a:r>
+          <a:noFill/>
+        </p:spPr>
+        <p:txBody>
+          <a:bodyPr wrap="none">
+            <a:spAutoFit/>
+          </a:bodyPr>
+          <a:lstStyle/>
+          <a:p>
+            <a:pPr algn="ctr"/>
+            <a:r>
+              <a:rPr sz="1200"/>
               <a:t>No</a:t>
             </a:r>
           </a:p>
@@ -4152,156 +4406,120 @@
       </p:sp>
       <p:sp>
         <p:nvSpPr>
-          <p:cNvPr id="32" name="Rectangle 31"/>
-          <p:cNvSpPr/>
+          <p:cNvPr id="32" name="TextBox 31"/>
+          <p:cNvSpPr txBox="1"/>
           <p:nvPr/>
         </p:nvSpPr>
         <p:spPr>
           <a:xfrm>
-            <a:off x="5048002" y="347847"/>
-            <a:ext cx="530391" cy="276999"/>
+            <a:off x="5966460" y="1164945"/>
+            <a:ext cx="530352" cy="277063"/>
           </a:xfrm>
           <a:prstGeom prst="rect">
             <a:avLst/>
           </a:prstGeom>
-        </p:spPr>
-        <p:style>
-          <a:lnRef idx="1">
-            <a:schemeClr val="accent1"/>
-          </a:lnRef>
-          <a:fillRef idx="3">
-            <a:schemeClr val="accent1"/>
-          </a:fillRef>
-          <a:effectRef idx="2">
-            <a:schemeClr val="accent1"/>
-          </a:effectRef>
-          <a:fontRef idx="minor">
-            <a:schemeClr val="lt1"/>
-          </a:fontRef>
-        </p:style>
-        <p:txBody>
-          <a:bodyPr rtlCol="0" anchor="ctr"/>
-          <a:lstStyle/>
-          <a:p>
-            <a:r>
-              <a:t>Yes</a:t>
-            </a:r>
-          </a:p>
-        </p:txBody>
-      </p:sp>
-      <p:sp>
-        <p:nvSpPr>
-          <p:cNvPr id="33" name="Rectangle 32"/>
-          <p:cNvSpPr/>
+          <a:noFill/>
+        </p:spPr>
+        <p:txBody>
+          <a:bodyPr wrap="none">
+            <a:spAutoFit/>
+          </a:bodyPr>
+          <a:lstStyle/>
+          <a:p>
+            <a:pPr algn="ctr"/>
+            <a:r>
+              <a:rPr sz="1200"/>
+              <a:t>No</a:t>
+            </a:r>
+          </a:p>
+        </p:txBody>
+      </p:sp>
+      <p:sp>
+        <p:nvSpPr>
+          <p:cNvPr id="33" name="TextBox 32"/>
+          <p:cNvSpPr txBox="1"/>
           <p:nvPr/>
         </p:nvSpPr>
         <p:spPr>
           <a:xfrm>
-            <a:off x="2958675" y="1123397"/>
-            <a:ext cx="530391" cy="276999"/>
+            <a:off x="3980383" y="2155240"/>
+            <a:ext cx="530352" cy="277063"/>
           </a:xfrm>
           <a:prstGeom prst="rect">
             <a:avLst/>
           </a:prstGeom>
-        </p:spPr>
-        <p:style>
-          <a:lnRef idx="1">
-            <a:schemeClr val="accent1"/>
-          </a:lnRef>
-          <a:fillRef idx="3">
-            <a:schemeClr val="accent1"/>
-          </a:fillRef>
-          <a:effectRef idx="2">
-            <a:schemeClr val="accent1"/>
-          </a:effectRef>
-          <a:fontRef idx="minor">
-            <a:schemeClr val="lt1"/>
-          </a:fontRef>
-        </p:style>
-        <p:txBody>
-          <a:bodyPr rtlCol="0" anchor="ctr"/>
-          <a:lstStyle/>
-          <a:p>
-            <a:r>
-              <a:t>Yes</a:t>
-            </a:r>
-          </a:p>
-        </p:txBody>
-      </p:sp>
-      <p:sp>
-        <p:nvSpPr>
-          <p:cNvPr id="34" name="Rectangle 33"/>
-          <p:cNvSpPr/>
+          <a:noFill/>
+        </p:spPr>
+        <p:txBody>
+          <a:bodyPr wrap="none">
+            <a:spAutoFit/>
+          </a:bodyPr>
+          <a:lstStyle/>
+          <a:p>
+            <a:pPr algn="ctr"/>
+            <a:r>
+              <a:rPr sz="1200"/>
+              <a:t>No</a:t>
+            </a:r>
+          </a:p>
+        </p:txBody>
+      </p:sp>
+      <p:sp>
+        <p:nvSpPr>
+          <p:cNvPr id="34" name="TextBox 33"/>
+          <p:cNvSpPr txBox="1"/>
           <p:nvPr/>
         </p:nvSpPr>
         <p:spPr>
           <a:xfrm>
-            <a:off x="833535" y="2099126"/>
-            <a:ext cx="530391" cy="276999"/>
+            <a:off x="5966460" y="3093415"/>
+            <a:ext cx="530352" cy="277063"/>
           </a:xfrm>
           <a:prstGeom prst="rect">
             <a:avLst/>
           </a:prstGeom>
-        </p:spPr>
-        <p:style>
-          <a:lnRef idx="1">
-            <a:schemeClr val="accent1"/>
-          </a:lnRef>
-          <a:fillRef idx="3">
-            <a:schemeClr val="accent1"/>
-          </a:fillRef>
-          <a:effectRef idx="2">
-            <a:schemeClr val="accent1"/>
-          </a:effectRef>
-          <a:fontRef idx="minor">
-            <a:schemeClr val="lt1"/>
-          </a:fontRef>
-        </p:style>
-        <p:txBody>
-          <a:bodyPr rtlCol="0" anchor="ctr"/>
-          <a:lstStyle/>
-          <a:p>
-            <a:r>
-              <a:t>Yes</a:t>
-            </a:r>
-          </a:p>
-        </p:txBody>
-      </p:sp>
-      <p:sp>
-        <p:nvSpPr>
-          <p:cNvPr id="35" name="Rectangle 34"/>
-          <p:cNvSpPr/>
+          <a:noFill/>
+        </p:spPr>
+        <p:txBody>
+          <a:bodyPr wrap="none">
+            <a:spAutoFit/>
+          </a:bodyPr>
+          <a:lstStyle/>
+          <a:p>
+            <a:pPr algn="ctr"/>
+            <a:r>
+              <a:rPr sz="1200"/>
+              <a:t>No</a:t>
+            </a:r>
+          </a:p>
+        </p:txBody>
+      </p:sp>
+      <p:sp>
+        <p:nvSpPr>
+          <p:cNvPr id="35" name="TextBox 34"/>
+          <p:cNvSpPr txBox="1"/>
           <p:nvPr/>
         </p:nvSpPr>
         <p:spPr>
           <a:xfrm>
-            <a:off x="2412588" y="3116562"/>
-            <a:ext cx="530391" cy="276999"/>
+            <a:off x="11292840" y="2165299"/>
+            <a:ext cx="530352" cy="277063"/>
           </a:xfrm>
           <a:prstGeom prst="rect">
             <a:avLst/>
           </a:prstGeom>
-        </p:spPr>
-        <p:style>
-          <a:lnRef idx="1">
-            <a:schemeClr val="accent1"/>
-          </a:lnRef>
-          <a:fillRef idx="3">
-            <a:schemeClr val="accent1"/>
-          </a:fillRef>
-          <a:effectRef idx="2">
-            <a:schemeClr val="accent1"/>
-          </a:effectRef>
-          <a:fontRef idx="minor">
-            <a:schemeClr val="lt1"/>
-          </a:fontRef>
-        </p:style>
-        <p:txBody>
-          <a:bodyPr rtlCol="0" anchor="ctr"/>
-          <a:lstStyle/>
-          <a:p>
-            <a:r>
-              <a:t>Yes</a:t>
+          <a:noFill/>
+        </p:spPr>
+        <p:txBody>
+          <a:bodyPr wrap="none">
+            <a:spAutoFit/>
+          </a:bodyPr>
+          <a:lstStyle/>
+          <a:p>
+            <a:pPr algn="ctr"/>
+            <a:r>
+              <a:rPr sz="1200"/>
+              <a:t>No</a:t>
             </a:r>
           </a:p>
         </p:txBody>
@@ -4325,44 +4543,44 @@
         <a:sysClr val="window" lastClr="FFFFFF"/>
       </a:lt1>
       <a:dk2>
-        <a:srgbClr val="1F497D"/>
+        <a:srgbClr val="44546A"/>
       </a:dk2>
       <a:lt2>
-        <a:srgbClr val="EEECE1"/>
+        <a:srgbClr val="E7E6E6"/>
       </a:lt2>
       <a:accent1>
-        <a:srgbClr val="4F81BD"/>
+        <a:srgbClr val="4472C4"/>
       </a:accent1>
       <a:accent2>
-        <a:srgbClr val="C0504D"/>
+        <a:srgbClr val="ED7D31"/>
       </a:accent2>
       <a:accent3>
-        <a:srgbClr val="9BBB59"/>
+        <a:srgbClr val="A5A5A5"/>
       </a:accent3>
       <a:accent4>
-        <a:srgbClr val="8064A2"/>
+        <a:srgbClr val="FFC000"/>
       </a:accent4>
       <a:accent5>
-        <a:srgbClr val="4BACC6"/>
+        <a:srgbClr val="5B9BD5"/>
       </a:accent5>
       <a:accent6>
-        <a:srgbClr val="F79646"/>
+        <a:srgbClr val="70AD47"/>
       </a:accent6>
       <a:hlink>
-        <a:srgbClr val="0000FF"/>
+        <a:srgbClr val="0563C1"/>
       </a:hlink>
       <a:folHlink>
-        <a:srgbClr val="800080"/>
+        <a:srgbClr val="954F72"/>
       </a:folHlink>
     </a:clrScheme>
     <a:fontScheme name="Office">
       <a:majorFont>
-        <a:latin typeface="Calibri"/>
+        <a:latin typeface="Calibri Light" panose="020F0302020204030204"/>
         <a:ea typeface=""/>
         <a:cs typeface=""/>
-        <a:font script="Jpan" typeface="ＭＳ Ｐゴシック"/>
+        <a:font script="Jpan" typeface="游ゴシック Light"/>
         <a:font script="Hang" typeface="맑은 고딕"/>
-        <a:font script="Hans" typeface="宋体"/>
+        <a:font script="Hans" typeface="等线 Light"/>
         <a:font script="Hant" typeface="新細明體"/>
         <a:font script="Arab" typeface="Times New Roman"/>
         <a:font script="Hebr" typeface="Times New Roman"/>
@@ -4390,14 +4608,31 @@
         <a:font script="Viet" typeface="Times New Roman"/>
         <a:font script="Uigh" typeface="Microsoft Uighur"/>
         <a:font script="Geor" typeface="Sylfaen"/>
+        <a:font script="Armn" typeface="Arial"/>
+        <a:font script="Bugi" typeface="Leelawadee UI"/>
+        <a:font script="Bopo" typeface="Microsoft JhengHei"/>
+        <a:font script="Java" typeface="Javanese Text"/>
+        <a:font script="Lisu" typeface="Segoe UI"/>
+        <a:font script="Mymr" typeface="Myanmar Text"/>
+        <a:font script="Nkoo" typeface="Ebrima"/>
+        <a:font script="Olck" typeface="Nirmala UI"/>
+        <a:font script="Osma" typeface="Ebrima"/>
+        <a:font script="Phag" typeface="Phagspa"/>
+        <a:font script="Syrn" typeface="Estrangelo Edessa"/>
+        <a:font script="Syrj" typeface="Estrangelo Edessa"/>
+        <a:font script="Syre" typeface="Estrangelo Edessa"/>
+        <a:font script="Sora" typeface="Nirmala UI"/>
+        <a:font script="Tale" typeface="Microsoft Tai Le"/>
+        <a:font script="Talu" typeface="Microsoft New Tai Lue"/>
+        <a:font script="Tfng" typeface="Ebrima"/>
       </a:majorFont>
       <a:minorFont>
-        <a:latin typeface="Calibri"/>
+        <a:latin typeface="Calibri" panose="020F0502020204030204"/>
         <a:ea typeface=""/>
         <a:cs typeface=""/>
-        <a:font script="Jpan" typeface="ＭＳ Ｐゴシック"/>
+        <a:font script="Jpan" typeface="游ゴシック"/>
         <a:font script="Hang" typeface="맑은 고딕"/>
-        <a:font script="Hans" typeface="宋体"/>
+        <a:font script="Hans" typeface="等线"/>
         <a:font script="Hant" typeface="新細明體"/>
         <a:font script="Arab" typeface="Arial"/>
         <a:font script="Hebr" typeface="Arial"/>
@@ -4425,6 +4660,23 @@
         <a:font script="Viet" typeface="Arial"/>
         <a:font script="Uigh" typeface="Microsoft Uighur"/>
         <a:font script="Geor" typeface="Sylfaen"/>
+        <a:font script="Armn" typeface="Arial"/>
+        <a:font script="Bugi" typeface="Leelawadee UI"/>
+        <a:font script="Bopo" typeface="Microsoft JhengHei"/>
+        <a:font script="Java" typeface="Javanese Text"/>
+        <a:font script="Lisu" typeface="Segoe UI"/>
+        <a:font script="Mymr" typeface="Myanmar Text"/>
+        <a:font script="Nkoo" typeface="Ebrima"/>
+        <a:font script="Olck" typeface="Nirmala UI"/>
+        <a:font script="Osma" typeface="Ebrima"/>
+        <a:font script="Phag" typeface="Phagspa"/>
+        <a:font script="Syrn" typeface="Estrangelo Edessa"/>
+        <a:font script="Syrj" typeface="Estrangelo Edessa"/>
+        <a:font script="Syre" typeface="Estrangelo Edessa"/>
+        <a:font script="Sora" typeface="Nirmala UI"/>
+        <a:font script="Tale" typeface="Microsoft Tai Le"/>
+        <a:font script="Talu" typeface="Microsoft New Tai Lue"/>
+        <a:font script="Tfng" typeface="Ebrima"/>
       </a:minorFont>
     </a:fontScheme>
     <a:fmtScheme name="Office">
@@ -4436,200 +4688,141 @@
           <a:gsLst>
             <a:gs pos="0">
               <a:schemeClr val="phClr">
-                <a:tint val="50000"/>
-                <a:satMod val="300000"/>
+                <a:lumMod val="110000"/>
+                <a:satMod val="105000"/>
+                <a:tint val="67000"/>
               </a:schemeClr>
             </a:gs>
-            <a:gs pos="35000">
+            <a:gs pos="50000">
               <a:schemeClr val="phClr">
-                <a:tint val="37000"/>
-                <a:satMod val="300000"/>
+                <a:lumMod val="105000"/>
+                <a:satMod val="103000"/>
+                <a:tint val="73000"/>
               </a:schemeClr>
             </a:gs>
             <a:gs pos="100000">
               <a:schemeClr val="phClr">
-                <a:tint val="15000"/>
-                <a:satMod val="350000"/>
+                <a:lumMod val="105000"/>
+                <a:satMod val="109000"/>
+                <a:tint val="81000"/>
               </a:schemeClr>
             </a:gs>
           </a:gsLst>
-          <a:lin ang="16200000" scaled="1"/>
+          <a:lin ang="5400000" scaled="0"/>
         </a:gradFill>
         <a:gradFill rotWithShape="1">
           <a:gsLst>
             <a:gs pos="0">
               <a:schemeClr val="phClr">
-                <a:tint val="100000"/>
+                <a:satMod val="103000"/>
+                <a:lumMod val="102000"/>
+                <a:tint val="94000"/>
+              </a:schemeClr>
+            </a:gs>
+            <a:gs pos="50000">
+              <a:schemeClr val="phClr">
+                <a:satMod val="110000"/>
+                <a:lumMod val="100000"/>
                 <a:shade val="100000"/>
-                <a:satMod val="130000"/>
               </a:schemeClr>
             </a:gs>
             <a:gs pos="100000">
               <a:schemeClr val="phClr">
-                <a:tint val="50000"/>
-                <a:shade val="100000"/>
-                <a:satMod val="350000"/>
+                <a:lumMod val="99000"/>
+                <a:satMod val="120000"/>
+                <a:shade val="78000"/>
               </a:schemeClr>
             </a:gs>
           </a:gsLst>
-          <a:lin ang="16200000" scaled="0"/>
+          <a:lin ang="5400000" scaled="0"/>
         </a:gradFill>
       </a:fillStyleLst>
       <a:lnStyleLst>
-        <a:ln w="9525" cap="flat" cmpd="sng" algn="ctr">
-          <a:solidFill>
-            <a:schemeClr val="phClr">
-              <a:shade val="95000"/>
-              <a:satMod val="105000"/>
-            </a:schemeClr>
-          </a:solidFill>
-          <a:prstDash val="solid"/>
-        </a:ln>
-        <a:ln w="25400" cap="flat" cmpd="sng" algn="ctr">
+        <a:ln w="6350" cap="flat" cmpd="sng" algn="ctr">
           <a:solidFill>
             <a:schemeClr val="phClr"/>
           </a:solidFill>
           <a:prstDash val="solid"/>
+          <a:miter lim="800000"/>
         </a:ln>
-        <a:ln w="38100" cap="flat" cmpd="sng" algn="ctr">
+        <a:ln w="12700" cap="flat" cmpd="sng" algn="ctr">
           <a:solidFill>
             <a:schemeClr val="phClr"/>
           </a:solidFill>
           <a:prstDash val="solid"/>
+          <a:miter lim="800000"/>
+        </a:ln>
+        <a:ln w="19050" cap="flat" cmpd="sng" algn="ctr">
+          <a:solidFill>
+            <a:schemeClr val="phClr"/>
+          </a:solidFill>
+          <a:prstDash val="solid"/>
+          <a:miter lim="800000"/>
         </a:ln>
       </a:lnStyleLst>
       <a:effectStyleLst>
         <a:effectStyle>
+          <a:effectLst/>
+        </a:effectStyle>
+        <a:effectStyle>
+          <a:effectLst/>
+        </a:effectStyle>
+        <a:effectStyle>
           <a:effectLst>
-            <a:outerShdw blurRad="40000" dist="20000" dir="5400000" rotWithShape="0">
+            <a:outerShdw blurRad="57150" dist="19050" dir="5400000" algn="ctr" rotWithShape="0">
               <a:srgbClr val="000000">
-                <a:alpha val="38000"/>
+                <a:alpha val="63000"/>
               </a:srgbClr>
             </a:outerShdw>
           </a:effectLst>
-        </a:effectStyle>
-        <a:effectStyle>
-          <a:effectLst>
-            <a:outerShdw blurRad="40000" dist="23000" dir="5400000" rotWithShape="0">
-              <a:srgbClr val="000000">
-                <a:alpha val="35000"/>
-              </a:srgbClr>
-            </a:outerShdw>
-          </a:effectLst>
-        </a:effectStyle>
-        <a:effectStyle>
-          <a:effectLst>
-            <a:outerShdw blurRad="40000" dist="23000" dir="5400000" rotWithShape="0">
-              <a:srgbClr val="000000">
-                <a:alpha val="35000"/>
-              </a:srgbClr>
-            </a:outerShdw>
-          </a:effectLst>
-          <a:scene3d>
-            <a:camera prst="orthographicFront">
-              <a:rot lat="0" lon="0" rev="0"/>
-            </a:camera>
-            <a:lightRig rig="threePt" dir="t">
-              <a:rot lat="0" lon="0" rev="1200000"/>
-            </a:lightRig>
-          </a:scene3d>
-          <a:sp3d>
-            <a:bevelT w="63500" h="25400"/>
-          </a:sp3d>
         </a:effectStyle>
       </a:effectStyleLst>
       <a:bgFillStyleLst>
         <a:solidFill>
           <a:schemeClr val="phClr"/>
         </a:solidFill>
+        <a:solidFill>
+          <a:schemeClr val="phClr">
+            <a:tint val="95000"/>
+            <a:satMod val="170000"/>
+          </a:schemeClr>
+        </a:solidFill>
         <a:gradFill rotWithShape="1">
           <a:gsLst>
             <a:gs pos="0">
               <a:schemeClr val="phClr">
-                <a:tint val="40000"/>
-                <a:satMod val="350000"/>
+                <a:tint val="93000"/>
+                <a:satMod val="150000"/>
+                <a:shade val="98000"/>
+                <a:lumMod val="102000"/>
               </a:schemeClr>
             </a:gs>
-            <a:gs pos="40000">
+            <a:gs pos="50000">
               <a:schemeClr val="phClr">
-                <a:tint val="45000"/>
-                <a:shade val="99000"/>
-                <a:satMod val="350000"/>
+                <a:tint val="98000"/>
+                <a:satMod val="130000"/>
+                <a:shade val="90000"/>
+                <a:lumMod val="103000"/>
               </a:schemeClr>
             </a:gs>
             <a:gs pos="100000">
               <a:schemeClr val="phClr">
-                <a:shade val="20000"/>
-                <a:satMod val="255000"/>
+                <a:shade val="63000"/>
+                <a:satMod val="120000"/>
               </a:schemeClr>
             </a:gs>
           </a:gsLst>
-          <a:path path="circle">
-            <a:fillToRect l="50000" t="-80000" r="50000" b="180000"/>
-          </a:path>
-        </a:gradFill>
-        <a:gradFill rotWithShape="1">
-          <a:gsLst>
-            <a:gs pos="0">
-              <a:schemeClr val="phClr">
-                <a:tint val="80000"/>
-                <a:satMod val="300000"/>
-              </a:schemeClr>
-            </a:gs>
-            <a:gs pos="100000">
-              <a:schemeClr val="phClr">
-                <a:shade val="30000"/>
-                <a:satMod val="200000"/>
-              </a:schemeClr>
-            </a:gs>
-          </a:gsLst>
-          <a:path path="circle">
-            <a:fillToRect l="50000" t="50000" r="50000" b="50000"/>
-          </a:path>
+          <a:lin ang="5400000" scaled="0"/>
         </a:gradFill>
       </a:bgFillStyleLst>
     </a:fmtScheme>
   </a:themeElements>
-  <a:objectDefaults>
-    <a:spDef>
-      <a:spPr/>
-      <a:bodyPr/>
-      <a:lstStyle/>
-      <a:style>
-        <a:lnRef idx="1">
-          <a:schemeClr val="accent1"/>
-        </a:lnRef>
-        <a:fillRef idx="3">
-          <a:schemeClr val="accent1"/>
-        </a:fillRef>
-        <a:effectRef idx="2">
-          <a:schemeClr val="accent1"/>
-        </a:effectRef>
-        <a:fontRef idx="minor">
-          <a:schemeClr val="lt1"/>
-        </a:fontRef>
-      </a:style>
-    </a:spDef>
-    <a:lnDef>
-      <a:spPr/>
-      <a:bodyPr/>
-      <a:lstStyle/>
-      <a:style>
-        <a:lnRef idx="2">
-          <a:schemeClr val="accent1"/>
-        </a:lnRef>
-        <a:fillRef idx="0">
-          <a:schemeClr val="accent1"/>
-        </a:fillRef>
-        <a:effectRef idx="1">
-          <a:schemeClr val="accent1"/>
-        </a:effectRef>
-        <a:fontRef idx="minor">
-          <a:schemeClr val="tx1"/>
-        </a:fontRef>
-      </a:style>
-    </a:lnDef>
-  </a:objectDefaults>
+  <a:objectDefaults/>
   <a:extraClrSchemeLst/>
+  <a:extLst>
+    <a:ext uri="{05A4C25C-085E-4340-85A3-A5531E510DB2}">
+      <thm15:themeFamily xmlns:thm15="http://schemas.microsoft.com/office/thememl/2012/main" name="Office Theme" id="{62F939B6-93AF-4DB8-9C6B-D6C7DFDC589F}" vid="{4A3C46E8-61CC-4603-A589-7422A47A8E4A}"/>
+    </a:ext>
+  </a:extLst>
 </a:theme>
 </file>